--- a/slides/3403 - 4.1 - Memory Busses.pptx
+++ b/slides/3403 - 4.1 - Memory Busses.pptx
@@ -5,7 +5,7 @@
     <p:sldMasterId id="2147483648" r:id="rId1"/>
   </p:sldMasterIdLst>
   <p:notesMasterIdLst>
-    <p:notesMasterId r:id="rId50"/>
+    <p:notesMasterId r:id="rId55"/>
   </p:notesMasterIdLst>
   <p:sldIdLst>
     <p:sldId id="256" r:id="rId2"/>
@@ -34,28 +34,33 @@
     <p:sldId id="279" r:id="rId25"/>
     <p:sldId id="293" r:id="rId26"/>
     <p:sldId id="280" r:id="rId27"/>
-    <p:sldId id="283" r:id="rId28"/>
-    <p:sldId id="286" r:id="rId29"/>
-    <p:sldId id="288" r:id="rId30"/>
-    <p:sldId id="285" r:id="rId31"/>
-    <p:sldId id="292" r:id="rId32"/>
-    <p:sldId id="289" r:id="rId33"/>
-    <p:sldId id="290" r:id="rId34"/>
-    <p:sldId id="291" r:id="rId35"/>
-    <p:sldId id="287" r:id="rId36"/>
-    <p:sldId id="294" r:id="rId37"/>
-    <p:sldId id="281" r:id="rId38"/>
-    <p:sldId id="296" r:id="rId39"/>
-    <p:sldId id="297" r:id="rId40"/>
-    <p:sldId id="298" r:id="rId41"/>
-    <p:sldId id="299" r:id="rId42"/>
-    <p:sldId id="295" r:id="rId43"/>
-    <p:sldId id="300" r:id="rId44"/>
-    <p:sldId id="301" r:id="rId45"/>
-    <p:sldId id="282" r:id="rId46"/>
-    <p:sldId id="284" r:id="rId47"/>
-    <p:sldId id="303" r:id="rId48"/>
-    <p:sldId id="302" r:id="rId49"/>
+    <p:sldId id="304" r:id="rId28"/>
+    <p:sldId id="283" r:id="rId29"/>
+    <p:sldId id="286" r:id="rId30"/>
+    <p:sldId id="288" r:id="rId31"/>
+    <p:sldId id="285" r:id="rId32"/>
+    <p:sldId id="292" r:id="rId33"/>
+    <p:sldId id="289" r:id="rId34"/>
+    <p:sldId id="290" r:id="rId35"/>
+    <p:sldId id="291" r:id="rId36"/>
+    <p:sldId id="306" r:id="rId37"/>
+    <p:sldId id="287" r:id="rId38"/>
+    <p:sldId id="305" r:id="rId39"/>
+    <p:sldId id="294" r:id="rId40"/>
+    <p:sldId id="281" r:id="rId41"/>
+    <p:sldId id="296" r:id="rId42"/>
+    <p:sldId id="297" r:id="rId43"/>
+    <p:sldId id="298" r:id="rId44"/>
+    <p:sldId id="299" r:id="rId45"/>
+    <p:sldId id="307" r:id="rId46"/>
+    <p:sldId id="295" r:id="rId47"/>
+    <p:sldId id="300" r:id="rId48"/>
+    <p:sldId id="301" r:id="rId49"/>
+    <p:sldId id="308" r:id="rId50"/>
+    <p:sldId id="282" r:id="rId51"/>
+    <p:sldId id="284" r:id="rId52"/>
+    <p:sldId id="303" r:id="rId53"/>
+    <p:sldId id="302" r:id="rId54"/>
   </p:sldIdLst>
   <p:sldSz cx="12192000" cy="6858000"/>
   <p:notesSz cx="6858000" cy="9144000"/>
@@ -244,7 +249,7 @@
           <a:p>
             <a:fld id="{DAB400AA-101D-490E-9D4E-C89A20702DB7}" type="datetimeFigureOut">
               <a:rPr lang="en-CA" smtClean="0"/>
-              <a:t>2026-03-01</a:t>
+              <a:t>2026-03-02</a:t>
             </a:fld>
             <a:endParaRPr lang="en-CA"/>
           </a:p>
@@ -745,7 +750,7 @@
           <a:p>
             <a:fld id="{49B572FD-17C4-4195-9A46-AE8481F14B8C}" type="datetime1">
               <a:rPr lang="en-CA" smtClean="0"/>
-              <a:t>2026-03-01</a:t>
+              <a:t>2026-03-02</a:t>
             </a:fld>
             <a:endParaRPr lang="en-CA"/>
           </a:p>
@@ -949,7 +954,7 @@
           <a:p>
             <a:fld id="{6FF888EE-D2E8-458C-B025-86AB65CB2342}" type="datetime1">
               <a:rPr lang="en-CA" smtClean="0"/>
-              <a:t>2026-03-01</a:t>
+              <a:t>2026-03-02</a:t>
             </a:fld>
             <a:endParaRPr lang="en-CA"/>
           </a:p>
@@ -1163,7 +1168,7 @@
           <a:p>
             <a:fld id="{54ED418E-0BAA-477E-AE93-7DEEFAFBE002}" type="datetime1">
               <a:rPr lang="en-CA" smtClean="0"/>
-              <a:t>2026-03-01</a:t>
+              <a:t>2026-03-02</a:t>
             </a:fld>
             <a:endParaRPr lang="en-CA"/>
           </a:p>
@@ -1367,7 +1372,7 @@
           <a:p>
             <a:fld id="{CDC1A3F7-612D-48D0-A380-86227BC8600F}" type="datetime1">
               <a:rPr lang="en-CA" smtClean="0"/>
-              <a:t>2026-03-01</a:t>
+              <a:t>2026-03-02</a:t>
             </a:fld>
             <a:endParaRPr lang="en-CA"/>
           </a:p>
@@ -1647,7 +1652,7 @@
           <a:p>
             <a:fld id="{474D8C76-B400-4F53-8805-742D98EC80C2}" type="datetime1">
               <a:rPr lang="en-CA" smtClean="0"/>
-              <a:t>2026-03-01</a:t>
+              <a:t>2026-03-02</a:t>
             </a:fld>
             <a:endParaRPr lang="en-CA"/>
           </a:p>
@@ -1919,7 +1924,7 @@
           <a:p>
             <a:fld id="{6D18C1D2-65BD-4030-B320-CFCAC7C2CF77}" type="datetime1">
               <a:rPr lang="en-CA" smtClean="0"/>
-              <a:t>2026-03-01</a:t>
+              <a:t>2026-03-02</a:t>
             </a:fld>
             <a:endParaRPr lang="en-CA"/>
           </a:p>
@@ -2338,7 +2343,7 @@
           <a:p>
             <a:fld id="{A9216206-5BA6-460D-9780-A5A1F3FC520F}" type="datetime1">
               <a:rPr lang="en-CA" smtClean="0"/>
-              <a:t>2026-03-01</a:t>
+              <a:t>2026-03-02</a:t>
             </a:fld>
             <a:endParaRPr lang="en-CA"/>
           </a:p>
@@ -2484,7 +2489,7 @@
           <a:p>
             <a:fld id="{F04C05AF-8116-461A-AD38-E69AB126D756}" type="datetime1">
               <a:rPr lang="en-CA" smtClean="0"/>
-              <a:t>2026-03-01</a:t>
+              <a:t>2026-03-02</a:t>
             </a:fld>
             <a:endParaRPr lang="en-CA"/>
           </a:p>
@@ -2601,7 +2606,7 @@
           <a:p>
             <a:fld id="{7E6A9D55-1BF1-40D6-87EC-FFE4362AD15D}" type="datetime1">
               <a:rPr lang="en-CA" smtClean="0"/>
-              <a:t>2026-03-01</a:t>
+              <a:t>2026-03-02</a:t>
             </a:fld>
             <a:endParaRPr lang="en-CA"/>
           </a:p>
@@ -2918,7 +2923,7 @@
           <a:p>
             <a:fld id="{CCEA4D12-9B66-4D3F-BFEA-EB6939410680}" type="datetime1">
               <a:rPr lang="en-CA" smtClean="0"/>
-              <a:t>2026-03-01</a:t>
+              <a:t>2026-03-02</a:t>
             </a:fld>
             <a:endParaRPr lang="en-CA"/>
           </a:p>
@@ -3211,7 +3216,7 @@
           <a:p>
             <a:fld id="{590ECAEB-FDAC-4944-A700-E5025FBDCFB8}" type="datetime1">
               <a:rPr lang="en-CA" smtClean="0"/>
-              <a:t>2026-03-01</a:t>
+              <a:t>2026-03-02</a:t>
             </a:fld>
             <a:endParaRPr lang="en-CA"/>
           </a:p>
@@ -3458,7 +3463,7 @@
           <a:p>
             <a:fld id="{8EE9C524-F283-4997-8372-EC621E6F8B97}" type="datetime1">
               <a:rPr lang="en-CA" smtClean="0"/>
-              <a:t>2026-03-01</a:t>
+              <a:t>2026-03-02</a:t>
             </a:fld>
             <a:endParaRPr lang="en-CA"/>
           </a:p>
@@ -3968,7 +3973,7 @@
           <a:p>
             <a:fld id="{A0105903-4A42-43A9-9B07-0A555E8C01D2}" type="datetime1">
               <a:rPr lang="en-CA" smtClean="0"/>
-              <a:t>2026-03-01</a:t>
+              <a:t>2026-03-02</a:t>
             </a:fld>
             <a:endParaRPr lang="en-CA"/>
           </a:p>
@@ -4261,7 +4266,7 @@
           <a:p>
             <a:fld id="{CDC1A3F7-612D-48D0-A380-86227BC8600F}" type="datetime1">
               <a:rPr lang="en-CA" smtClean="0"/>
-              <a:t>2026-03-01</a:t>
+              <a:t>2026-03-02</a:t>
             </a:fld>
             <a:endParaRPr lang="en-CA"/>
           </a:p>
@@ -7528,7 +7533,7 @@
           <a:p>
             <a:fld id="{CDC1A3F7-612D-48D0-A380-86227BC8600F}" type="datetime1">
               <a:rPr lang="en-CA" smtClean="0"/>
-              <a:t>2026-03-01</a:t>
+              <a:t>2026-03-02</a:t>
             </a:fld>
             <a:endParaRPr lang="en-CA"/>
           </a:p>
@@ -9271,7 +9276,7 @@
           <a:p>
             <a:fld id="{CDC1A3F7-612D-48D0-A380-86227BC8600F}" type="datetime1">
               <a:rPr lang="en-CA" smtClean="0"/>
-              <a:t>2026-03-01</a:t>
+              <a:t>2026-03-02</a:t>
             </a:fld>
             <a:endParaRPr lang="en-CA"/>
           </a:p>
@@ -15708,7 +15713,7 @@
           <a:p>
             <a:fld id="{CDC1A3F7-612D-48D0-A380-86227BC8600F}" type="datetime1">
               <a:rPr lang="en-CA" smtClean="0"/>
-              <a:t>2026-03-01</a:t>
+              <a:t>2026-03-02</a:t>
             </a:fld>
             <a:endParaRPr lang="en-CA"/>
           </a:p>
@@ -27239,7 +27244,7 @@
           <a:p>
             <a:fld id="{CDC1A3F7-612D-48D0-A380-86227BC8600F}" type="datetime1">
               <a:rPr lang="en-CA" smtClean="0"/>
-              <a:t>2026-03-01</a:t>
+              <a:t>2026-03-02</a:t>
             </a:fld>
             <a:endParaRPr lang="en-CA"/>
           </a:p>
@@ -36660,7 +36665,7 @@
           <a:p>
             <a:fld id="{CDC1A3F7-612D-48D0-A380-86227BC8600F}" type="datetime1">
               <a:rPr lang="en-CA" smtClean="0"/>
-              <a:t>2026-03-01</a:t>
+              <a:t>2026-03-02</a:t>
             </a:fld>
             <a:endParaRPr lang="en-CA"/>
           </a:p>
@@ -36867,7 +36872,7 @@
           <a:p>
             <a:fld id="{CDC1A3F7-612D-48D0-A380-86227BC8600F}" type="datetime1">
               <a:rPr lang="en-CA" smtClean="0"/>
-              <a:t>2026-03-01</a:t>
+              <a:t>2026-03-02</a:t>
             </a:fld>
             <a:endParaRPr lang="en-CA"/>
           </a:p>
@@ -37165,7 +37170,7 @@
           <a:p>
             <a:fld id="{CDC1A3F7-612D-48D0-A380-86227BC8600F}" type="datetime1">
               <a:rPr lang="en-CA" smtClean="0"/>
-              <a:t>2026-03-01</a:t>
+              <a:t>2026-03-02</a:t>
             </a:fld>
             <a:endParaRPr lang="en-CA"/>
           </a:p>
@@ -37347,8 +37352,36 @@
           <a:lstStyle/>
           <a:p>
             <a:r>
+              <a:rPr lang="en-CA" b="1" dirty="0"/>
+              <a:t>AHB</a:t>
+            </a:r>
+            <a:r>
               <a:rPr lang="en-CA" dirty="0"/>
-              <a:t>AHBP (Advanced High-performance Bus)</a:t>
+              <a:t> (</a:t>
+            </a:r>
+            <a:r>
+              <a:rPr lang="en-CA" b="1" dirty="0"/>
+              <a:t>A</a:t>
+            </a:r>
+            <a:r>
+              <a:rPr lang="en-CA" dirty="0"/>
+              <a:t>dvanced </a:t>
+            </a:r>
+            <a:r>
+              <a:rPr lang="en-CA" b="1" dirty="0"/>
+              <a:t>H</a:t>
+            </a:r>
+            <a:r>
+              <a:rPr lang="en-CA" dirty="0"/>
+              <a:t>igh-performance </a:t>
+            </a:r>
+            <a:r>
+              <a:rPr lang="en-CA" b="1" dirty="0"/>
+              <a:t>B</a:t>
+            </a:r>
+            <a:r>
+              <a:rPr lang="en-CA" dirty="0"/>
+              <a:t>us)</a:t>
             </a:r>
           </a:p>
           <a:p>
@@ -37360,8 +37393,36 @@
           </a:p>
           <a:p>
             <a:r>
+              <a:rPr lang="en-CA" b="1" dirty="0"/>
+              <a:t>APB</a:t>
+            </a:r>
+            <a:r>
               <a:rPr lang="en-CA" dirty="0"/>
-              <a:t>APB (Advanced Peripheral Bus)</a:t>
+              <a:t> (</a:t>
+            </a:r>
+            <a:r>
+              <a:rPr lang="en-CA" b="1" dirty="0"/>
+              <a:t>A</a:t>
+            </a:r>
+            <a:r>
+              <a:rPr lang="en-CA" dirty="0"/>
+              <a:t>dvanced </a:t>
+            </a:r>
+            <a:r>
+              <a:rPr lang="en-CA" b="1" dirty="0"/>
+              <a:t>P</a:t>
+            </a:r>
+            <a:r>
+              <a:rPr lang="en-CA" dirty="0"/>
+              <a:t>eripheral </a:t>
+            </a:r>
+            <a:r>
+              <a:rPr lang="en-CA" b="1" dirty="0"/>
+              <a:t>B</a:t>
+            </a:r>
+            <a:r>
+              <a:rPr lang="en-CA" dirty="0"/>
+              <a:t>us)</a:t>
             </a:r>
           </a:p>
           <a:p>
@@ -37373,23 +37434,51 @@
           </a:p>
           <a:p>
             <a:r>
+              <a:rPr lang="en-CA" b="1" dirty="0"/>
+              <a:t>AXI</a:t>
+            </a:r>
+            <a:r>
               <a:rPr lang="en-CA" dirty="0"/>
-              <a:t>AXI (Advanced </a:t>
+              <a:t> (</a:t>
+            </a:r>
+            <a:r>
+              <a:rPr lang="en-CA" b="1" dirty="0"/>
+              <a:t>A</a:t>
+            </a:r>
+            <a:r>
+              <a:rPr lang="en-CA" dirty="0"/>
+              <a:t>dvanced </a:t>
             </a:r>
             <a:r>
               <a:rPr lang="en-CA" dirty="0" err="1"/>
-              <a:t>eXtensible</a:t>
+              <a:t>e</a:t>
+            </a:r>
+            <a:r>
+              <a:rPr lang="en-CA" b="1" dirty="0" err="1"/>
+              <a:t>X</a:t>
+            </a:r>
+            <a:r>
+              <a:rPr lang="en-CA" dirty="0" err="1"/>
+              <a:t>tensible</a:t>
             </a:r>
             <a:r>
               <a:rPr lang="en-CA" dirty="0"/>
-              <a:t> Interface)</a:t>
+              <a:t> </a:t>
+            </a:r>
+            <a:r>
+              <a:rPr lang="en-CA" b="1" dirty="0"/>
+              <a:t>I</a:t>
+            </a:r>
+            <a:r>
+              <a:rPr lang="en-CA" dirty="0"/>
+              <a:t>nterface)</a:t>
             </a:r>
           </a:p>
           <a:p>
             <a:pPr lvl="1"/>
             <a:r>
               <a:rPr lang="en-CA" dirty="0"/>
-              <a:t>Higher performance than AHBP – allows more features like multiple “outstanding transfers”</a:t>
+              <a:t>Higher performance than AHB – allows more features like multiple “outstanding transfers”</a:t>
             </a:r>
           </a:p>
         </p:txBody>
@@ -37417,7 +37506,7 @@
           <a:p>
             <a:fld id="{CDC1A3F7-612D-48D0-A380-86227BC8600F}" type="datetime1">
               <a:rPr lang="en-CA" smtClean="0"/>
-              <a:t>2026-03-01</a:t>
+              <a:t>2026-03-02</a:t>
             </a:fld>
             <a:endParaRPr lang="en-CA"/>
           </a:p>
@@ -37567,7 +37656,7 @@
           <a:p>
             <a:r>
               <a:rPr lang="en-CA" dirty="0"/>
-              <a:t>Naïve Bus Protocol Implementation</a:t>
+              <a:t>Naïve Bus Protocol Implementation (hope data is ready)</a:t>
             </a:r>
           </a:p>
         </p:txBody>
@@ -37595,7 +37684,7 @@
           <a:p>
             <a:fld id="{CDC1A3F7-612D-48D0-A380-86227BC8600F}" type="datetime1">
               <a:rPr lang="en-CA" smtClean="0"/>
-              <a:t>2026-03-01</a:t>
+              <a:t>2026-03-02</a:t>
             </a:fld>
             <a:endParaRPr lang="en-CA"/>
           </a:p>
@@ -38007,7 +38096,7 @@
           <a:p>
             <a:fld id="{A165975C-2D17-4D58-BAA2-AE3D2D8697E0}" type="datetime1">
               <a:rPr lang="en-CA" smtClean="0"/>
-              <a:t>2026-03-01</a:t>
+              <a:t>2026-03-02</a:t>
             </a:fld>
             <a:endParaRPr lang="en-CA"/>
           </a:p>
@@ -38163,7 +38252,7 @@
           <a:p>
             <a:r>
               <a:rPr lang="en-CA" dirty="0"/>
-              <a:t>Realistic Bus Protocol Implementation</a:t>
+              <a:t>Realistic Bus Protocol Implementation (acknowledge signal)</a:t>
             </a:r>
           </a:p>
         </p:txBody>
@@ -38191,7 +38280,7 @@
           <a:p>
             <a:fld id="{CDC1A3F7-612D-48D0-A380-86227BC8600F}" type="datetime1">
               <a:rPr lang="en-CA" smtClean="0"/>
-              <a:t>2026-03-01</a:t>
+              <a:t>2026-03-02</a:t>
             </a:fld>
             <a:endParaRPr lang="en-CA"/>
           </a:p>
@@ -38519,7 +38608,7 @@
           <a:p>
             <a:r>
               <a:rPr lang="en-CA" dirty="0"/>
-              <a:t>Outstanding Transactions</a:t>
+              <a:t>Avoiding Stalls: Outstanding Transactions</a:t>
             </a:r>
           </a:p>
         </p:txBody>
@@ -38547,7 +38636,7 @@
           <a:p>
             <a:fld id="{CDC1A3F7-612D-48D0-A380-86227BC8600F}" type="datetime1">
               <a:rPr lang="en-CA" smtClean="0"/>
-              <a:t>2026-03-01</a:t>
+              <a:t>2026-03-02</a:t>
             </a:fld>
             <a:endParaRPr lang="en-CA"/>
           </a:p>
@@ -38885,7 +38974,7 @@
           <a:p>
             <a:r>
               <a:rPr lang="en-CA" dirty="0"/>
-              <a:t>AHBP Signaling</a:t>
+              <a:t>AHB Signaling</a:t>
             </a:r>
           </a:p>
         </p:txBody>
@@ -38913,7 +39002,7 @@
           <a:p>
             <a:fld id="{CDC1A3F7-612D-48D0-A380-86227BC8600F}" type="datetime1">
               <a:rPr lang="en-CA" smtClean="0"/>
-              <a:t>2026-03-01</a:t>
+              <a:t>2026-03-02</a:t>
             </a:fld>
             <a:endParaRPr lang="en-CA"/>
           </a:p>
@@ -39060,7 +39149,7 @@
           <a:p>
             <a:r>
               <a:rPr lang="en-CA" dirty="0"/>
-              <a:t>AHBP Signals</a:t>
+              <a:t>AHB Signals</a:t>
             </a:r>
           </a:p>
         </p:txBody>
@@ -39120,7 +39209,7 @@
           <a:p>
             <a:fld id="{CDC1A3F7-612D-48D0-A380-86227BC8600F}" type="datetime1">
               <a:rPr lang="en-CA" smtClean="0"/>
-              <a:t>2026-03-01</a:t>
+              <a:t>2026-03-02</a:t>
             </a:fld>
             <a:endParaRPr lang="en-CA"/>
           </a:p>
@@ -39307,7 +39396,7 @@
           <a:p>
             <a:fld id="{CDC1A3F7-612D-48D0-A380-86227BC8600F}" type="datetime1">
               <a:rPr lang="en-CA" smtClean="0"/>
-              <a:t>2026-03-01</a:t>
+              <a:t>2026-03-02</a:t>
             </a:fld>
             <a:endParaRPr lang="en-CA"/>
           </a:p>
@@ -39739,7 +39828,7 @@
           <a:p>
             <a:fld id="{CDC1A3F7-612D-48D0-A380-86227BC8600F}" type="datetime1">
               <a:rPr lang="en-CA" smtClean="0"/>
-              <a:t>2026-03-01</a:t>
+              <a:t>2026-03-02</a:t>
             </a:fld>
             <a:endParaRPr lang="en-CA"/>
           </a:p>
@@ -39868,6 +39957,347 @@
           <p:cNvPr id="2" name="Title 1">
             <a:extLst>
               <a:ext uri="{FF2B5EF4-FFF2-40B4-BE49-F238E27FC236}">
+                <a16:creationId xmlns:a16="http://schemas.microsoft.com/office/drawing/2014/main" id="{AFDC62CB-D3BB-B4B2-1863-D9F703C94134}"/>
+              </a:ext>
+            </a:extLst>
+          </p:cNvPr>
+          <p:cNvSpPr>
+            <a:spLocks noGrp="1"/>
+          </p:cNvSpPr>
+          <p:nvPr>
+            <p:ph type="title"/>
+          </p:nvPr>
+        </p:nvSpPr>
+        <p:spPr/>
+        <p:txBody>
+          <a:bodyPr/>
+          <a:lstStyle/>
+          <a:p>
+            <a:r>
+              <a:rPr lang="en-CA" dirty="0"/>
+              <a:t>Round Robin</a:t>
+            </a:r>
+          </a:p>
+        </p:txBody>
+      </p:sp>
+      <p:sp>
+        <p:nvSpPr>
+          <p:cNvPr id="4" name="Date Placeholder 3">
+            <a:extLst>
+              <a:ext uri="{FF2B5EF4-FFF2-40B4-BE49-F238E27FC236}">
+                <a16:creationId xmlns:a16="http://schemas.microsoft.com/office/drawing/2014/main" id="{8CA47D53-A37B-60C6-8C3C-4830E5A2C5FF}"/>
+              </a:ext>
+            </a:extLst>
+          </p:cNvPr>
+          <p:cNvSpPr>
+            <a:spLocks noGrp="1"/>
+          </p:cNvSpPr>
+          <p:nvPr>
+            <p:ph type="dt" sz="half" idx="10"/>
+          </p:nvPr>
+        </p:nvSpPr>
+        <p:spPr/>
+        <p:txBody>
+          <a:bodyPr/>
+          <a:lstStyle/>
+          <a:p>
+            <a:fld id="{CDC1A3F7-612D-48D0-A380-86227BC8600F}" type="datetime1">
+              <a:rPr lang="en-CA" smtClean="0"/>
+              <a:t>2026-03-02</a:t>
+            </a:fld>
+            <a:endParaRPr lang="en-CA"/>
+          </a:p>
+        </p:txBody>
+      </p:sp>
+      <p:sp>
+        <p:nvSpPr>
+          <p:cNvPr id="5" name="Footer Placeholder 4">
+            <a:extLst>
+              <a:ext uri="{FF2B5EF4-FFF2-40B4-BE49-F238E27FC236}">
+                <a16:creationId xmlns:a16="http://schemas.microsoft.com/office/drawing/2014/main" id="{FFDECE2E-F92A-0961-2946-F5E3CA8EBA90}"/>
+              </a:ext>
+            </a:extLst>
+          </p:cNvPr>
+          <p:cNvSpPr>
+            <a:spLocks noGrp="1"/>
+          </p:cNvSpPr>
+          <p:nvPr>
+            <p:ph type="ftr" sz="quarter" idx="11"/>
+          </p:nvPr>
+        </p:nvSpPr>
+        <p:spPr/>
+        <p:txBody>
+          <a:bodyPr/>
+          <a:lstStyle/>
+          <a:p>
+            <a:r>
+              <a:rPr lang="en-US"/>
+              <a:t>ECED3403 Computer Architecture. Colin O'Flynn.</a:t>
+            </a:r>
+            <a:endParaRPr lang="en-CA"/>
+          </a:p>
+        </p:txBody>
+      </p:sp>
+      <p:sp>
+        <p:nvSpPr>
+          <p:cNvPr id="6" name="Slide Number Placeholder 5">
+            <a:extLst>
+              <a:ext uri="{FF2B5EF4-FFF2-40B4-BE49-F238E27FC236}">
+                <a16:creationId xmlns:a16="http://schemas.microsoft.com/office/drawing/2014/main" id="{8CD375F2-9AD2-A375-F6C5-DB95C71E422D}"/>
+              </a:ext>
+            </a:extLst>
+          </p:cNvPr>
+          <p:cNvSpPr>
+            <a:spLocks noGrp="1"/>
+          </p:cNvSpPr>
+          <p:nvPr>
+            <p:ph type="sldNum" sz="quarter" idx="12"/>
+          </p:nvPr>
+        </p:nvSpPr>
+        <p:spPr/>
+        <p:txBody>
+          <a:bodyPr/>
+          <a:lstStyle/>
+          <a:p>
+            <a:fld id="{CF25CC40-D0F6-4666-ABAA-DE78F621EF61}" type="slidenum">
+              <a:rPr lang="en-CA" smtClean="0"/>
+              <a:t>27</a:t>
+            </a:fld>
+            <a:endParaRPr lang="en-CA"/>
+          </a:p>
+        </p:txBody>
+      </p:sp>
+      <p:sp>
+        <p:nvSpPr>
+          <p:cNvPr id="7" name="Rectangle 6">
+            <a:extLst>
+              <a:ext uri="{FF2B5EF4-FFF2-40B4-BE49-F238E27FC236}">
+                <a16:creationId xmlns:a16="http://schemas.microsoft.com/office/drawing/2014/main" id="{BD7EE353-3356-BBC8-E348-D8559EAB8ED4}"/>
+              </a:ext>
+            </a:extLst>
+          </p:cNvPr>
+          <p:cNvSpPr/>
+          <p:nvPr/>
+        </p:nvSpPr>
+        <p:spPr>
+          <a:xfrm>
+            <a:off x="2188308" y="1690688"/>
+            <a:ext cx="1393092" cy="1201004"/>
+          </a:xfrm>
+          <a:prstGeom prst="rect">
+            <a:avLst/>
+          </a:prstGeom>
+        </p:spPr>
+        <p:style>
+          <a:lnRef idx="2">
+            <a:schemeClr val="accent1">
+              <a:shade val="15000"/>
+            </a:schemeClr>
+          </a:lnRef>
+          <a:fillRef idx="1">
+            <a:schemeClr val="accent1"/>
+          </a:fillRef>
+          <a:effectRef idx="0">
+            <a:schemeClr val="accent1"/>
+          </a:effectRef>
+          <a:fontRef idx="minor">
+            <a:schemeClr val="lt1"/>
+          </a:fontRef>
+        </p:style>
+        <p:txBody>
+          <a:bodyPr rtlCol="0" anchor="ctr"/>
+          <a:lstStyle/>
+          <a:p>
+            <a:pPr algn="ctr"/>
+            <a:r>
+              <a:rPr lang="en-CA" dirty="0"/>
+              <a:t>DMA2</a:t>
+            </a:r>
+          </a:p>
+        </p:txBody>
+      </p:sp>
+      <p:sp>
+        <p:nvSpPr>
+          <p:cNvPr id="8" name="Rectangle 7">
+            <a:extLst>
+              <a:ext uri="{FF2B5EF4-FFF2-40B4-BE49-F238E27FC236}">
+                <a16:creationId xmlns:a16="http://schemas.microsoft.com/office/drawing/2014/main" id="{4C39471E-C8D7-276A-121F-51964A6C1557}"/>
+              </a:ext>
+            </a:extLst>
+          </p:cNvPr>
+          <p:cNvSpPr/>
+          <p:nvPr/>
+        </p:nvSpPr>
+        <p:spPr>
+          <a:xfrm>
+            <a:off x="6760308" y="1690688"/>
+            <a:ext cx="1393092" cy="1201004"/>
+          </a:xfrm>
+          <a:prstGeom prst="rect">
+            <a:avLst/>
+          </a:prstGeom>
+        </p:spPr>
+        <p:style>
+          <a:lnRef idx="2">
+            <a:schemeClr val="accent1">
+              <a:shade val="15000"/>
+            </a:schemeClr>
+          </a:lnRef>
+          <a:fillRef idx="1">
+            <a:schemeClr val="accent1"/>
+          </a:fillRef>
+          <a:effectRef idx="0">
+            <a:schemeClr val="accent1"/>
+          </a:effectRef>
+          <a:fontRef idx="minor">
+            <a:schemeClr val="lt1"/>
+          </a:fontRef>
+        </p:style>
+        <p:txBody>
+          <a:bodyPr rtlCol="0" anchor="ctr"/>
+          <a:lstStyle/>
+          <a:p>
+            <a:pPr algn="ctr"/>
+            <a:r>
+              <a:rPr lang="en-CA" dirty="0"/>
+              <a:t>Core: I-Bus</a:t>
+            </a:r>
+          </a:p>
+        </p:txBody>
+      </p:sp>
+      <p:sp>
+        <p:nvSpPr>
+          <p:cNvPr id="9" name="Rectangle 8">
+            <a:extLst>
+              <a:ext uri="{FF2B5EF4-FFF2-40B4-BE49-F238E27FC236}">
+                <a16:creationId xmlns:a16="http://schemas.microsoft.com/office/drawing/2014/main" id="{9639CB4B-AC14-B99D-FFA5-9E8552C62575}"/>
+              </a:ext>
+            </a:extLst>
+          </p:cNvPr>
+          <p:cNvSpPr/>
+          <p:nvPr/>
+        </p:nvSpPr>
+        <p:spPr>
+          <a:xfrm>
+            <a:off x="2188308" y="4023519"/>
+            <a:ext cx="1393092" cy="1201004"/>
+          </a:xfrm>
+          <a:prstGeom prst="rect">
+            <a:avLst/>
+          </a:prstGeom>
+        </p:spPr>
+        <p:style>
+          <a:lnRef idx="2">
+            <a:schemeClr val="accent1">
+              <a:shade val="15000"/>
+            </a:schemeClr>
+          </a:lnRef>
+          <a:fillRef idx="1">
+            <a:schemeClr val="accent1"/>
+          </a:fillRef>
+          <a:effectRef idx="0">
+            <a:schemeClr val="accent1"/>
+          </a:effectRef>
+          <a:fontRef idx="minor">
+            <a:schemeClr val="lt1"/>
+          </a:fontRef>
+        </p:style>
+        <p:txBody>
+          <a:bodyPr rtlCol="0" anchor="ctr"/>
+          <a:lstStyle/>
+          <a:p>
+            <a:pPr algn="ctr"/>
+            <a:r>
+              <a:rPr lang="en-CA" dirty="0"/>
+              <a:t>DMA1</a:t>
+            </a:r>
+          </a:p>
+        </p:txBody>
+      </p:sp>
+      <p:sp>
+        <p:nvSpPr>
+          <p:cNvPr id="10" name="Rectangle 9">
+            <a:extLst>
+              <a:ext uri="{FF2B5EF4-FFF2-40B4-BE49-F238E27FC236}">
+                <a16:creationId xmlns:a16="http://schemas.microsoft.com/office/drawing/2014/main" id="{285E825C-E93E-3D56-0427-EDD9BA528475}"/>
+              </a:ext>
+            </a:extLst>
+          </p:cNvPr>
+          <p:cNvSpPr/>
+          <p:nvPr/>
+        </p:nvSpPr>
+        <p:spPr>
+          <a:xfrm>
+            <a:off x="6760308" y="4023519"/>
+            <a:ext cx="1393092" cy="1201004"/>
+          </a:xfrm>
+          <a:prstGeom prst="rect">
+            <a:avLst/>
+          </a:prstGeom>
+        </p:spPr>
+        <p:style>
+          <a:lnRef idx="2">
+            <a:schemeClr val="accent1">
+              <a:shade val="15000"/>
+            </a:schemeClr>
+          </a:lnRef>
+          <a:fillRef idx="1">
+            <a:schemeClr val="accent1"/>
+          </a:fillRef>
+          <a:effectRef idx="0">
+            <a:schemeClr val="accent1"/>
+          </a:effectRef>
+          <a:fontRef idx="minor">
+            <a:schemeClr val="lt1"/>
+          </a:fontRef>
+        </p:style>
+        <p:txBody>
+          <a:bodyPr rtlCol="0" anchor="ctr"/>
+          <a:lstStyle/>
+          <a:p>
+            <a:pPr algn="ctr"/>
+            <a:r>
+              <a:rPr lang="en-CA" dirty="0"/>
+              <a:t>Core: D-Bus</a:t>
+            </a:r>
+          </a:p>
+        </p:txBody>
+      </p:sp>
+    </p:spTree>
+    <p:extLst>
+      <p:ext uri="{BB962C8B-B14F-4D97-AF65-F5344CB8AC3E}">
+        <p14:creationId xmlns:p14="http://schemas.microsoft.com/office/powerpoint/2010/main" val="1129777567"/>
+      </p:ext>
+    </p:extLst>
+  </p:cSld>
+  <p:clrMapOvr>
+    <a:masterClrMapping/>
+  </p:clrMapOvr>
+</p:sld>
+</file>
+
+<file path=ppt/slides/slide28.xml><?xml version="1.0" encoding="utf-8"?>
+<p:sld xmlns:a="http://schemas.openxmlformats.org/drawingml/2006/main" xmlns:r="http://schemas.openxmlformats.org/officeDocument/2006/relationships" xmlns:p="http://schemas.openxmlformats.org/presentationml/2006/main">
+  <p:cSld>
+    <p:spTree>
+      <p:nvGrpSpPr>
+        <p:cNvPr id="1" name=""/>
+        <p:cNvGrpSpPr/>
+        <p:nvPr/>
+      </p:nvGrpSpPr>
+      <p:grpSpPr>
+        <a:xfrm>
+          <a:off x="0" y="0"/>
+          <a:ext cx="0" cy="0"/>
+          <a:chOff x="0" y="0"/>
+          <a:chExt cx="0" cy="0"/>
+        </a:xfrm>
+      </p:grpSpPr>
+      <p:sp>
+        <p:nvSpPr>
+          <p:cNvPr id="2" name="Title 1">
+            <a:extLst>
+              <a:ext uri="{FF2B5EF4-FFF2-40B4-BE49-F238E27FC236}">
                 <a16:creationId xmlns:a16="http://schemas.microsoft.com/office/drawing/2014/main" id="{9279865E-A43B-0BC0-2D00-920EFD4E4C5F}"/>
               </a:ext>
             </a:extLst>
@@ -39998,7 +40428,7 @@
           <a:p>
             <a:fld id="{CDC1A3F7-612D-48D0-A380-86227BC8600F}" type="datetime1">
               <a:rPr lang="en-CA" smtClean="0"/>
-              <a:t>2026-03-01</a:t>
+              <a:t>2026-03-02</a:t>
             </a:fld>
             <a:endParaRPr lang="en-CA"/>
           </a:p>
@@ -40056,7 +40486,7 @@
           <a:p>
             <a:fld id="{CF25CC40-D0F6-4666-ABAA-DE78F621EF61}" type="slidenum">
               <a:rPr lang="en-CA" smtClean="0"/>
-              <a:t>27</a:t>
+              <a:t>28</a:t>
             </a:fld>
             <a:endParaRPr lang="en-CA"/>
           </a:p>
@@ -40105,7 +40535,7 @@
 </p:sld>
 </file>
 
-<file path=ppt/slides/slide28.xml><?xml version="1.0" encoding="utf-8"?>
+<file path=ppt/slides/slide29.xml><?xml version="1.0" encoding="utf-8"?>
 <p:sld xmlns:a="http://schemas.openxmlformats.org/drawingml/2006/main" xmlns:r="http://schemas.openxmlformats.org/officeDocument/2006/relationships" xmlns:p="http://schemas.openxmlformats.org/presentationml/2006/main">
   <p:cSld>
     <p:spTree>
@@ -40286,7 +40716,7 @@
           <a:p>
             <a:fld id="{CF25CC40-D0F6-4666-ABAA-DE78F621EF61}" type="slidenum">
               <a:rPr lang="en-CA" smtClean="0"/>
-              <a:t>28</a:t>
+              <a:t>29</a:t>
             </a:fld>
             <a:endParaRPr lang="en-CA"/>
           </a:p>
@@ -40538,270 +40968,6 @@
 </p:sld>
 </file>
 
-<file path=ppt/slides/slide29.xml><?xml version="1.0" encoding="utf-8"?>
-<p:sld xmlns:a="http://schemas.openxmlformats.org/drawingml/2006/main" xmlns:r="http://schemas.openxmlformats.org/officeDocument/2006/relationships" xmlns:p="http://schemas.openxmlformats.org/presentationml/2006/main">
-  <p:cSld>
-    <p:spTree>
-      <p:nvGrpSpPr>
-        <p:cNvPr id="1" name=""/>
-        <p:cNvGrpSpPr/>
-        <p:nvPr/>
-      </p:nvGrpSpPr>
-      <p:grpSpPr>
-        <a:xfrm>
-          <a:off x="0" y="0"/>
-          <a:ext cx="0" cy="0"/>
-          <a:chOff x="0" y="0"/>
-          <a:chExt cx="0" cy="0"/>
-        </a:xfrm>
-      </p:grpSpPr>
-      <p:sp>
-        <p:nvSpPr>
-          <p:cNvPr id="2" name="Title 1">
-            <a:extLst>
-              <a:ext uri="{FF2B5EF4-FFF2-40B4-BE49-F238E27FC236}">
-                <a16:creationId xmlns:a16="http://schemas.microsoft.com/office/drawing/2014/main" id="{9456CFB9-00FA-A9D4-7DEE-F0535B919306}"/>
-              </a:ext>
-            </a:extLst>
-          </p:cNvPr>
-          <p:cNvSpPr>
-            <a:spLocks noGrp="1"/>
-          </p:cNvSpPr>
-          <p:nvPr>
-            <p:ph type="title"/>
-          </p:nvPr>
-        </p:nvSpPr>
-        <p:spPr/>
-        <p:txBody>
-          <a:bodyPr/>
-          <a:lstStyle/>
-          <a:p>
-            <a:r>
-              <a:rPr lang="en-CA" dirty="0"/>
-              <a:t>DMA Usage</a:t>
-            </a:r>
-          </a:p>
-        </p:txBody>
-      </p:sp>
-      <p:sp>
-        <p:nvSpPr>
-          <p:cNvPr id="3" name="Content Placeholder 2">
-            <a:extLst>
-              <a:ext uri="{FF2B5EF4-FFF2-40B4-BE49-F238E27FC236}">
-                <a16:creationId xmlns:a16="http://schemas.microsoft.com/office/drawing/2014/main" id="{9E5732EE-0CA9-F86C-3390-769D194BEE1A}"/>
-              </a:ext>
-            </a:extLst>
-          </p:cNvPr>
-          <p:cNvSpPr>
-            <a:spLocks noGrp="1"/>
-          </p:cNvSpPr>
-          <p:nvPr>
-            <p:ph idx="1"/>
-          </p:nvPr>
-        </p:nvSpPr>
-        <p:spPr/>
-        <p:txBody>
-          <a:bodyPr/>
-          <a:lstStyle/>
-          <a:p>
-            <a:r>
-              <a:rPr lang="en-CA" dirty="0"/>
-              <a:t>DMA is one of the </a:t>
-            </a:r>
-            <a:r>
-              <a:rPr lang="en-CA" u="sng" dirty="0"/>
-              <a:t>most powerful</a:t>
-            </a:r>
-            <a:r>
-              <a:rPr lang="en-CA" dirty="0"/>
-              <a:t> features of microcontrollers you can use.</a:t>
-            </a:r>
-          </a:p>
-          <a:p>
-            <a:r>
-              <a:rPr lang="en-CA" dirty="0"/>
-              <a:t>Many programs are </a:t>
-            </a:r>
-            <a:r>
-              <a:rPr lang="en-CA" u="sng" dirty="0"/>
-              <a:t>only possible</a:t>
-            </a:r>
-            <a:r>
-              <a:rPr lang="en-CA" dirty="0"/>
-              <a:t> with DMA, for example:</a:t>
-            </a:r>
-          </a:p>
-          <a:p>
-            <a:pPr lvl="1"/>
-            <a:r>
-              <a:rPr lang="en-CA" dirty="0"/>
-              <a:t>USB Microphone would have:</a:t>
-            </a:r>
-          </a:p>
-          <a:p>
-            <a:pPr lvl="2"/>
-            <a:r>
-              <a:rPr lang="en-CA" dirty="0"/>
-              <a:t>DMA from ADC</a:t>
-            </a:r>
-            <a:r>
-              <a:rPr lang="en-CA" dirty="0">
-                <a:sym typeface="Wingdings" panose="05000000000000000000" pitchFamily="2" charset="2"/>
-              </a:rPr>
-              <a:t> Memory</a:t>
-            </a:r>
-          </a:p>
-          <a:p>
-            <a:pPr lvl="2"/>
-            <a:r>
-              <a:rPr lang="en-CA" dirty="0">
-                <a:sym typeface="Wingdings" panose="05000000000000000000" pitchFamily="2" charset="2"/>
-              </a:rPr>
-              <a:t>DMA from Memory  USB</a:t>
-            </a:r>
-          </a:p>
-          <a:p>
-            <a:pPr lvl="2"/>
-            <a:r>
-              <a:rPr lang="en-CA" dirty="0">
-                <a:sym typeface="Wingdings" panose="05000000000000000000" pitchFamily="2" charset="2"/>
-              </a:rPr>
-              <a:t>Microcontroller does “housekeeping” keeping signals alive</a:t>
-            </a:r>
-          </a:p>
-          <a:p>
-            <a:pPr lvl="2"/>
-            <a:endParaRPr lang="en-CA" dirty="0">
-              <a:sym typeface="Wingdings" panose="05000000000000000000" pitchFamily="2" charset="2"/>
-            </a:endParaRPr>
-          </a:p>
-          <a:p>
-            <a:r>
-              <a:rPr lang="en-CA" dirty="0">
-                <a:sym typeface="Wingdings" panose="05000000000000000000" pitchFamily="2" charset="2"/>
-              </a:rPr>
-              <a:t>Normally </a:t>
-            </a:r>
-            <a:r>
-              <a:rPr lang="en-CA" u="sng" dirty="0">
-                <a:sym typeface="Wingdings" panose="05000000000000000000" pitchFamily="2" charset="2"/>
-              </a:rPr>
-              <a:t>required</a:t>
-            </a:r>
-            <a:r>
-              <a:rPr lang="en-CA" dirty="0">
-                <a:sym typeface="Wingdings" panose="05000000000000000000" pitchFamily="2" charset="2"/>
-              </a:rPr>
-              <a:t> for sampling &amp; high-throughput communications</a:t>
-            </a:r>
-            <a:endParaRPr lang="en-CA" dirty="0"/>
-          </a:p>
-          <a:p>
-            <a:pPr lvl="1"/>
-            <a:endParaRPr lang="en-CA" dirty="0"/>
-          </a:p>
-        </p:txBody>
-      </p:sp>
-      <p:sp>
-        <p:nvSpPr>
-          <p:cNvPr id="4" name="Date Placeholder 3">
-            <a:extLst>
-              <a:ext uri="{FF2B5EF4-FFF2-40B4-BE49-F238E27FC236}">
-                <a16:creationId xmlns:a16="http://schemas.microsoft.com/office/drawing/2014/main" id="{329CF7F5-B86F-C0A9-EC72-EACF8250512E}"/>
-              </a:ext>
-            </a:extLst>
-          </p:cNvPr>
-          <p:cNvSpPr>
-            <a:spLocks noGrp="1"/>
-          </p:cNvSpPr>
-          <p:nvPr>
-            <p:ph type="dt" sz="half" idx="10"/>
-          </p:nvPr>
-        </p:nvSpPr>
-        <p:spPr/>
-        <p:txBody>
-          <a:bodyPr/>
-          <a:lstStyle/>
-          <a:p>
-            <a:fld id="{CDC1A3F7-612D-48D0-A380-86227BC8600F}" type="datetime1">
-              <a:rPr lang="en-CA" smtClean="0"/>
-              <a:t>2026-03-02</a:t>
-            </a:fld>
-            <a:endParaRPr lang="en-CA"/>
-          </a:p>
-        </p:txBody>
-      </p:sp>
-      <p:sp>
-        <p:nvSpPr>
-          <p:cNvPr id="5" name="Footer Placeholder 4">
-            <a:extLst>
-              <a:ext uri="{FF2B5EF4-FFF2-40B4-BE49-F238E27FC236}">
-                <a16:creationId xmlns:a16="http://schemas.microsoft.com/office/drawing/2014/main" id="{0285D149-3179-6AFF-A703-D3425341CD41}"/>
-              </a:ext>
-            </a:extLst>
-          </p:cNvPr>
-          <p:cNvSpPr>
-            <a:spLocks noGrp="1"/>
-          </p:cNvSpPr>
-          <p:nvPr>
-            <p:ph type="ftr" sz="quarter" idx="11"/>
-          </p:nvPr>
-        </p:nvSpPr>
-        <p:spPr/>
-        <p:txBody>
-          <a:bodyPr/>
-          <a:lstStyle/>
-          <a:p>
-            <a:r>
-              <a:rPr lang="en-US"/>
-              <a:t>ECED3403 Computer Architecture. Colin O'Flynn.</a:t>
-            </a:r>
-            <a:endParaRPr lang="en-CA"/>
-          </a:p>
-        </p:txBody>
-      </p:sp>
-      <p:sp>
-        <p:nvSpPr>
-          <p:cNvPr id="6" name="Slide Number Placeholder 5">
-            <a:extLst>
-              <a:ext uri="{FF2B5EF4-FFF2-40B4-BE49-F238E27FC236}">
-                <a16:creationId xmlns:a16="http://schemas.microsoft.com/office/drawing/2014/main" id="{A85CD4C3-D5CE-81B1-01B5-A04F41F100C7}"/>
-              </a:ext>
-            </a:extLst>
-          </p:cNvPr>
-          <p:cNvSpPr>
-            <a:spLocks noGrp="1"/>
-          </p:cNvSpPr>
-          <p:nvPr>
-            <p:ph type="sldNum" sz="quarter" idx="12"/>
-          </p:nvPr>
-        </p:nvSpPr>
-        <p:spPr/>
-        <p:txBody>
-          <a:bodyPr/>
-          <a:lstStyle/>
-          <a:p>
-            <a:fld id="{CF25CC40-D0F6-4666-ABAA-DE78F621EF61}" type="slidenum">
-              <a:rPr lang="en-CA" smtClean="0"/>
-              <a:t>29</a:t>
-            </a:fld>
-            <a:endParaRPr lang="en-CA"/>
-          </a:p>
-        </p:txBody>
-      </p:sp>
-    </p:spTree>
-    <p:extLst>
-      <p:ext uri="{BB962C8B-B14F-4D97-AF65-F5344CB8AC3E}">
-        <p14:creationId xmlns:p14="http://schemas.microsoft.com/office/powerpoint/2010/main" val="1356324282"/>
-      </p:ext>
-    </p:extLst>
-  </p:cSld>
-  <p:clrMapOvr>
-    <a:masterClrMapping/>
-  </p:clrMapOvr>
-</p:sld>
-</file>
-
 <file path=ppt/slides/slide3.xml><?xml version="1.0" encoding="utf-8"?>
 <p:sld xmlns:a="http://schemas.openxmlformats.org/drawingml/2006/main" xmlns:r="http://schemas.openxmlformats.org/officeDocument/2006/relationships" xmlns:p="http://schemas.openxmlformats.org/presentationml/2006/main">
   <p:cSld>
@@ -40874,7 +41040,7 @@
           <a:p>
             <a:fld id="{CDC1A3F7-612D-48D0-A380-86227BC8600F}" type="datetime1">
               <a:rPr lang="en-CA" smtClean="0"/>
-              <a:t>2026-03-01</a:t>
+              <a:t>2026-03-02</a:t>
             </a:fld>
             <a:endParaRPr lang="en-CA"/>
           </a:p>
@@ -41044,7 +41210,7 @@
           <p:cNvPr id="2" name="Title 1">
             <a:extLst>
               <a:ext uri="{FF2B5EF4-FFF2-40B4-BE49-F238E27FC236}">
-                <a16:creationId xmlns:a16="http://schemas.microsoft.com/office/drawing/2014/main" id="{5CD86572-F38C-F263-CB27-E695E3468D8D}"/>
+                <a16:creationId xmlns:a16="http://schemas.microsoft.com/office/drawing/2014/main" id="{9456CFB9-00FA-A9D4-7DEE-F0535B919306}"/>
               </a:ext>
             </a:extLst>
           </p:cNvPr>
@@ -41062,8 +41228,127 @@
           <a:p>
             <a:r>
               <a:rPr lang="en-CA" dirty="0"/>
-              <a:t>e.g., DMA Demo</a:t>
+              <a:t>DMA Usage</a:t>
             </a:r>
+          </a:p>
+        </p:txBody>
+      </p:sp>
+      <p:sp>
+        <p:nvSpPr>
+          <p:cNvPr id="3" name="Content Placeholder 2">
+            <a:extLst>
+              <a:ext uri="{FF2B5EF4-FFF2-40B4-BE49-F238E27FC236}">
+                <a16:creationId xmlns:a16="http://schemas.microsoft.com/office/drawing/2014/main" id="{9E5732EE-0CA9-F86C-3390-769D194BEE1A}"/>
+              </a:ext>
+            </a:extLst>
+          </p:cNvPr>
+          <p:cNvSpPr>
+            <a:spLocks noGrp="1"/>
+          </p:cNvSpPr>
+          <p:nvPr>
+            <p:ph idx="1"/>
+          </p:nvPr>
+        </p:nvSpPr>
+        <p:spPr/>
+        <p:txBody>
+          <a:bodyPr/>
+          <a:lstStyle/>
+          <a:p>
+            <a:r>
+              <a:rPr lang="en-CA" dirty="0"/>
+              <a:t>DMA is one of the </a:t>
+            </a:r>
+            <a:r>
+              <a:rPr lang="en-CA" u="sng" dirty="0"/>
+              <a:t>most powerful</a:t>
+            </a:r>
+            <a:r>
+              <a:rPr lang="en-CA" dirty="0"/>
+              <a:t> features of microcontrollers you can use with high I/O requirements.</a:t>
+            </a:r>
+          </a:p>
+          <a:p>
+            <a:r>
+              <a:rPr lang="en-CA" dirty="0"/>
+              <a:t>Many programs are </a:t>
+            </a:r>
+            <a:r>
+              <a:rPr lang="en-CA" u="sng" dirty="0"/>
+              <a:t>only possible</a:t>
+            </a:r>
+            <a:r>
+              <a:rPr lang="en-CA" dirty="0"/>
+              <a:t> with DMA, for example:</a:t>
+            </a:r>
+          </a:p>
+          <a:p>
+            <a:pPr lvl="1"/>
+            <a:r>
+              <a:rPr lang="en-CA" dirty="0"/>
+              <a:t>USB Microphone would have:</a:t>
+            </a:r>
+          </a:p>
+          <a:p>
+            <a:pPr lvl="2"/>
+            <a:r>
+              <a:rPr lang="en-CA" dirty="0"/>
+              <a:t>DMA from ADC</a:t>
+            </a:r>
+            <a:r>
+              <a:rPr lang="en-CA" dirty="0">
+                <a:sym typeface="Wingdings" panose="05000000000000000000" pitchFamily="2" charset="2"/>
+              </a:rPr>
+              <a:t> Memory</a:t>
+            </a:r>
+          </a:p>
+          <a:p>
+            <a:pPr lvl="2"/>
+            <a:r>
+              <a:rPr lang="en-CA" dirty="0">
+                <a:sym typeface="Wingdings" panose="05000000000000000000" pitchFamily="2" charset="2"/>
+              </a:rPr>
+              <a:t>DMA from Memory  USB</a:t>
+            </a:r>
+          </a:p>
+          <a:p>
+            <a:pPr lvl="2"/>
+            <a:r>
+              <a:rPr lang="en-CA" dirty="0">
+                <a:sym typeface="Wingdings" panose="05000000000000000000" pitchFamily="2" charset="2"/>
+              </a:rPr>
+              <a:t>Microcontroller does “housekeeping” keeping signals alive</a:t>
+            </a:r>
+          </a:p>
+          <a:p>
+            <a:pPr lvl="2"/>
+            <a:endParaRPr lang="en-CA" dirty="0">
+              <a:sym typeface="Wingdings" panose="05000000000000000000" pitchFamily="2" charset="2"/>
+            </a:endParaRPr>
+          </a:p>
+          <a:p>
+            <a:r>
+              <a:rPr lang="en-CA" dirty="0">
+                <a:sym typeface="Wingdings" panose="05000000000000000000" pitchFamily="2" charset="2"/>
+              </a:rPr>
+              <a:t>Normally </a:t>
+            </a:r>
+            <a:r>
+              <a:rPr lang="en-CA" u="sng" dirty="0">
+                <a:sym typeface="Wingdings" panose="05000000000000000000" pitchFamily="2" charset="2"/>
+              </a:rPr>
+              <a:t>required</a:t>
+            </a:r>
+            <a:r>
+              <a:rPr lang="en-CA" dirty="0">
+                <a:sym typeface="Wingdings" panose="05000000000000000000" pitchFamily="2" charset="2"/>
+              </a:rPr>
+              <a:t> for sampling &amp; high-throughput communications</a:t>
+            </a:r>
+            <a:endParaRPr lang="en-CA" dirty="0"/>
+          </a:p>
+          <a:p>
+            <a:pPr lvl="1"/>
+            <a:endParaRPr lang="en-CA" dirty="0"/>
           </a:p>
         </p:txBody>
       </p:sp>
@@ -41072,7 +41357,7 @@
           <p:cNvPr id="4" name="Date Placeholder 3">
             <a:extLst>
               <a:ext uri="{FF2B5EF4-FFF2-40B4-BE49-F238E27FC236}">
-                <a16:creationId xmlns:a16="http://schemas.microsoft.com/office/drawing/2014/main" id="{5A38233B-94D1-12D3-A519-F2A225ABEAFC}"/>
+                <a16:creationId xmlns:a16="http://schemas.microsoft.com/office/drawing/2014/main" id="{329CF7F5-B86F-C0A9-EC72-EACF8250512E}"/>
               </a:ext>
             </a:extLst>
           </p:cNvPr>
@@ -41101,7 +41386,7 @@
           <p:cNvPr id="5" name="Footer Placeholder 4">
             <a:extLst>
               <a:ext uri="{FF2B5EF4-FFF2-40B4-BE49-F238E27FC236}">
-                <a16:creationId xmlns:a16="http://schemas.microsoft.com/office/drawing/2014/main" id="{EC5A6427-1142-0C9C-3707-A406F2C974DB}"/>
+                <a16:creationId xmlns:a16="http://schemas.microsoft.com/office/drawing/2014/main" id="{0285D149-3179-6AFF-A703-D3425341CD41}"/>
               </a:ext>
             </a:extLst>
           </p:cNvPr>
@@ -41130,7 +41415,7 @@
           <p:cNvPr id="6" name="Slide Number Placeholder 5">
             <a:extLst>
               <a:ext uri="{FF2B5EF4-FFF2-40B4-BE49-F238E27FC236}">
-                <a16:creationId xmlns:a16="http://schemas.microsoft.com/office/drawing/2014/main" id="{30911FAE-8452-6DC0-EF57-2CB975C92A9A}"/>
+                <a16:creationId xmlns:a16="http://schemas.microsoft.com/office/drawing/2014/main" id="{A85CD4C3-D5CE-81B1-01B5-A04F41F100C7}"/>
               </a:ext>
             </a:extLst>
           </p:cNvPr>
@@ -41149,6 +41434,151 @@
             <a:fld id="{CF25CC40-D0F6-4666-ABAA-DE78F621EF61}" type="slidenum">
               <a:rPr lang="en-CA" smtClean="0"/>
               <a:t>30</a:t>
+            </a:fld>
+            <a:endParaRPr lang="en-CA"/>
+          </a:p>
+        </p:txBody>
+      </p:sp>
+    </p:spTree>
+    <p:extLst>
+      <p:ext uri="{BB962C8B-B14F-4D97-AF65-F5344CB8AC3E}">
+        <p14:creationId xmlns:p14="http://schemas.microsoft.com/office/powerpoint/2010/main" val="1356324282"/>
+      </p:ext>
+    </p:extLst>
+  </p:cSld>
+  <p:clrMapOvr>
+    <a:masterClrMapping/>
+  </p:clrMapOvr>
+</p:sld>
+</file>
+
+<file path=ppt/slides/slide31.xml><?xml version="1.0" encoding="utf-8"?>
+<p:sld xmlns:a="http://schemas.openxmlformats.org/drawingml/2006/main" xmlns:r="http://schemas.openxmlformats.org/officeDocument/2006/relationships" xmlns:p="http://schemas.openxmlformats.org/presentationml/2006/main">
+  <p:cSld>
+    <p:spTree>
+      <p:nvGrpSpPr>
+        <p:cNvPr id="1" name=""/>
+        <p:cNvGrpSpPr/>
+        <p:nvPr/>
+      </p:nvGrpSpPr>
+      <p:grpSpPr>
+        <a:xfrm>
+          <a:off x="0" y="0"/>
+          <a:ext cx="0" cy="0"/>
+          <a:chOff x="0" y="0"/>
+          <a:chExt cx="0" cy="0"/>
+        </a:xfrm>
+      </p:grpSpPr>
+      <p:sp>
+        <p:nvSpPr>
+          <p:cNvPr id="2" name="Title 1">
+            <a:extLst>
+              <a:ext uri="{FF2B5EF4-FFF2-40B4-BE49-F238E27FC236}">
+                <a16:creationId xmlns:a16="http://schemas.microsoft.com/office/drawing/2014/main" id="{5CD86572-F38C-F263-CB27-E695E3468D8D}"/>
+              </a:ext>
+            </a:extLst>
+          </p:cNvPr>
+          <p:cNvSpPr>
+            <a:spLocks noGrp="1"/>
+          </p:cNvSpPr>
+          <p:nvPr>
+            <p:ph type="title"/>
+          </p:nvPr>
+        </p:nvSpPr>
+        <p:spPr/>
+        <p:txBody>
+          <a:bodyPr/>
+          <a:lstStyle/>
+          <a:p>
+            <a:r>
+              <a:rPr lang="en-CA" dirty="0"/>
+              <a:t>e.g., DMA Demo</a:t>
+            </a:r>
+          </a:p>
+        </p:txBody>
+      </p:sp>
+      <p:sp>
+        <p:nvSpPr>
+          <p:cNvPr id="4" name="Date Placeholder 3">
+            <a:extLst>
+              <a:ext uri="{FF2B5EF4-FFF2-40B4-BE49-F238E27FC236}">
+                <a16:creationId xmlns:a16="http://schemas.microsoft.com/office/drawing/2014/main" id="{5A38233B-94D1-12D3-A519-F2A225ABEAFC}"/>
+              </a:ext>
+            </a:extLst>
+          </p:cNvPr>
+          <p:cNvSpPr>
+            <a:spLocks noGrp="1"/>
+          </p:cNvSpPr>
+          <p:nvPr>
+            <p:ph type="dt" sz="half" idx="10"/>
+          </p:nvPr>
+        </p:nvSpPr>
+        <p:spPr/>
+        <p:txBody>
+          <a:bodyPr/>
+          <a:lstStyle/>
+          <a:p>
+            <a:fld id="{CDC1A3F7-612D-48D0-A380-86227BC8600F}" type="datetime1">
+              <a:rPr lang="en-CA" smtClean="0"/>
+              <a:t>2026-03-02</a:t>
+            </a:fld>
+            <a:endParaRPr lang="en-CA"/>
+          </a:p>
+        </p:txBody>
+      </p:sp>
+      <p:sp>
+        <p:nvSpPr>
+          <p:cNvPr id="5" name="Footer Placeholder 4">
+            <a:extLst>
+              <a:ext uri="{FF2B5EF4-FFF2-40B4-BE49-F238E27FC236}">
+                <a16:creationId xmlns:a16="http://schemas.microsoft.com/office/drawing/2014/main" id="{EC5A6427-1142-0C9C-3707-A406F2C974DB}"/>
+              </a:ext>
+            </a:extLst>
+          </p:cNvPr>
+          <p:cNvSpPr>
+            <a:spLocks noGrp="1"/>
+          </p:cNvSpPr>
+          <p:nvPr>
+            <p:ph type="ftr" sz="quarter" idx="11"/>
+          </p:nvPr>
+        </p:nvSpPr>
+        <p:spPr/>
+        <p:txBody>
+          <a:bodyPr/>
+          <a:lstStyle/>
+          <a:p>
+            <a:r>
+              <a:rPr lang="en-US"/>
+              <a:t>ECED3403 Computer Architecture. Colin O'Flynn.</a:t>
+            </a:r>
+            <a:endParaRPr lang="en-CA"/>
+          </a:p>
+        </p:txBody>
+      </p:sp>
+      <p:sp>
+        <p:nvSpPr>
+          <p:cNvPr id="6" name="Slide Number Placeholder 5">
+            <a:extLst>
+              <a:ext uri="{FF2B5EF4-FFF2-40B4-BE49-F238E27FC236}">
+                <a16:creationId xmlns:a16="http://schemas.microsoft.com/office/drawing/2014/main" id="{30911FAE-8452-6DC0-EF57-2CB975C92A9A}"/>
+              </a:ext>
+            </a:extLst>
+          </p:cNvPr>
+          <p:cNvSpPr>
+            <a:spLocks noGrp="1"/>
+          </p:cNvSpPr>
+          <p:nvPr>
+            <p:ph type="sldNum" sz="quarter" idx="12"/>
+          </p:nvPr>
+        </p:nvSpPr>
+        <p:spPr/>
+        <p:txBody>
+          <a:bodyPr/>
+          <a:lstStyle/>
+          <a:p>
+            <a:fld id="{CF25CC40-D0F6-4666-ABAA-DE78F621EF61}" type="slidenum">
+              <a:rPr lang="en-CA" smtClean="0"/>
+              <a:t>31</a:t>
             </a:fld>
             <a:endParaRPr lang="en-CA"/>
           </a:p>
@@ -41197,7 +41627,7 @@
 </p:sld>
 </file>
 
-<file path=ppt/slides/slide31.xml><?xml version="1.0" encoding="utf-8"?>
+<file path=ppt/slides/slide32.xml><?xml version="1.0" encoding="utf-8"?>
 <p:sld xmlns:a="http://schemas.openxmlformats.org/drawingml/2006/main" xmlns:r="http://schemas.openxmlformats.org/officeDocument/2006/relationships" xmlns:p="http://schemas.openxmlformats.org/presentationml/2006/main">
   <p:cSld>
     <p:spTree>
@@ -41373,7 +41803,7 @@
           <a:p>
             <a:fld id="{CF25CC40-D0F6-4666-ABAA-DE78F621EF61}" type="slidenum">
               <a:rPr lang="en-CA" smtClean="0"/>
-              <a:t>31</a:t>
+              <a:t>32</a:t>
             </a:fld>
             <a:endParaRPr lang="en-CA"/>
           </a:p>
@@ -41383,234 +41813,6 @@
     <p:extLst>
       <p:ext uri="{BB962C8B-B14F-4D97-AF65-F5344CB8AC3E}">
         <p14:creationId xmlns:p14="http://schemas.microsoft.com/office/powerpoint/2010/main" val="878789786"/>
-      </p:ext>
-    </p:extLst>
-  </p:cSld>
-  <p:clrMapOvr>
-    <a:masterClrMapping/>
-  </p:clrMapOvr>
-</p:sld>
-</file>
-
-<file path=ppt/slides/slide32.xml><?xml version="1.0" encoding="utf-8"?>
-<p:sld xmlns:a="http://schemas.openxmlformats.org/drawingml/2006/main" xmlns:r="http://schemas.openxmlformats.org/officeDocument/2006/relationships" xmlns:p="http://schemas.openxmlformats.org/presentationml/2006/main">
-  <p:cSld>
-    <p:spTree>
-      <p:nvGrpSpPr>
-        <p:cNvPr id="1" name=""/>
-        <p:cNvGrpSpPr/>
-        <p:nvPr/>
-      </p:nvGrpSpPr>
-      <p:grpSpPr>
-        <a:xfrm>
-          <a:off x="0" y="0"/>
-          <a:ext cx="0" cy="0"/>
-          <a:chOff x="0" y="0"/>
-          <a:chExt cx="0" cy="0"/>
-        </a:xfrm>
-      </p:grpSpPr>
-      <p:sp>
-        <p:nvSpPr>
-          <p:cNvPr id="2" name="Title 1">
-            <a:extLst>
-              <a:ext uri="{FF2B5EF4-FFF2-40B4-BE49-F238E27FC236}">
-                <a16:creationId xmlns:a16="http://schemas.microsoft.com/office/drawing/2014/main" id="{6C650D31-33B3-A8F8-9D55-D06EA88B96B8}"/>
-              </a:ext>
-            </a:extLst>
-          </p:cNvPr>
-          <p:cNvSpPr>
-            <a:spLocks noGrp="1"/>
-          </p:cNvSpPr>
-          <p:nvPr>
-            <p:ph type="title"/>
-          </p:nvPr>
-        </p:nvSpPr>
-        <p:spPr/>
-        <p:txBody>
-          <a:bodyPr/>
-          <a:lstStyle/>
-          <a:p>
-            <a:r>
-              <a:rPr lang="en-CA" dirty="0"/>
-              <a:t>DMA Usage: High-Level</a:t>
-            </a:r>
-          </a:p>
-        </p:txBody>
-      </p:sp>
-      <p:sp>
-        <p:nvSpPr>
-          <p:cNvPr id="3" name="Content Placeholder 2">
-            <a:extLst>
-              <a:ext uri="{FF2B5EF4-FFF2-40B4-BE49-F238E27FC236}">
-                <a16:creationId xmlns:a16="http://schemas.microsoft.com/office/drawing/2014/main" id="{6A6FE54F-A506-F088-A16F-1A6AC7F34528}"/>
-              </a:ext>
-            </a:extLst>
-          </p:cNvPr>
-          <p:cNvSpPr>
-            <a:spLocks noGrp="1"/>
-          </p:cNvSpPr>
-          <p:nvPr>
-            <p:ph idx="1"/>
-          </p:nvPr>
-        </p:nvSpPr>
-        <p:spPr/>
-        <p:txBody>
-          <a:bodyPr/>
-          <a:lstStyle/>
-          <a:p>
-            <a:r>
-              <a:rPr lang="en-CA" dirty="0"/>
-              <a:t>Set source &amp; destination addresses</a:t>
-            </a:r>
-          </a:p>
-          <a:p>
-            <a:r>
-              <a:rPr lang="en-CA" dirty="0"/>
-              <a:t>Set if either address should automatically increment (normally </a:t>
-            </a:r>
-            <a:r>
-              <a:rPr lang="en-CA" b="1" dirty="0"/>
-              <a:t>not</a:t>
-            </a:r>
-            <a:r>
-              <a:rPr lang="en-CA" dirty="0"/>
-              <a:t> incrementing for peripherals, but </a:t>
-            </a:r>
-            <a:r>
-              <a:rPr lang="en-CA" b="1" dirty="0"/>
-              <a:t>do</a:t>
-            </a:r>
-            <a:r>
-              <a:rPr lang="en-CA" dirty="0"/>
-              <a:t> increment for memory)</a:t>
-            </a:r>
-          </a:p>
-          <a:p>
-            <a:r>
-              <a:rPr lang="en-CA" dirty="0"/>
-              <a:t>Set word size (e.g., normally 32 bits)</a:t>
-            </a:r>
-          </a:p>
-          <a:p>
-            <a:r>
-              <a:rPr lang="en-CA" dirty="0"/>
-              <a:t>Set number of </a:t>
-            </a:r>
-            <a:r>
-              <a:rPr lang="en-CA" b="1" dirty="0"/>
-              <a:t>words</a:t>
-            </a:r>
-            <a:r>
-              <a:rPr lang="en-CA" dirty="0"/>
-              <a:t> to transfer</a:t>
-            </a:r>
-          </a:p>
-          <a:p>
-            <a:pPr lvl="1"/>
-            <a:r>
-              <a:rPr lang="en-CA" dirty="0"/>
-              <a:t>Watch out for Bytes/Words confusion!</a:t>
-            </a:r>
-          </a:p>
-          <a:p>
-            <a:r>
-              <a:rPr lang="en-CA" dirty="0"/>
-              <a:t>Enable &amp; let it go!</a:t>
-            </a:r>
-          </a:p>
-        </p:txBody>
-      </p:sp>
-      <p:sp>
-        <p:nvSpPr>
-          <p:cNvPr id="4" name="Date Placeholder 3">
-            <a:extLst>
-              <a:ext uri="{FF2B5EF4-FFF2-40B4-BE49-F238E27FC236}">
-                <a16:creationId xmlns:a16="http://schemas.microsoft.com/office/drawing/2014/main" id="{B1149A94-3236-71D5-64A3-EC39D7821014}"/>
-              </a:ext>
-            </a:extLst>
-          </p:cNvPr>
-          <p:cNvSpPr>
-            <a:spLocks noGrp="1"/>
-          </p:cNvSpPr>
-          <p:nvPr>
-            <p:ph type="dt" sz="half" idx="10"/>
-          </p:nvPr>
-        </p:nvSpPr>
-        <p:spPr/>
-        <p:txBody>
-          <a:bodyPr/>
-          <a:lstStyle/>
-          <a:p>
-            <a:fld id="{CDC1A3F7-612D-48D0-A380-86227BC8600F}" type="datetime1">
-              <a:rPr lang="en-CA" smtClean="0"/>
-              <a:t>2026-03-02</a:t>
-            </a:fld>
-            <a:endParaRPr lang="en-CA"/>
-          </a:p>
-        </p:txBody>
-      </p:sp>
-      <p:sp>
-        <p:nvSpPr>
-          <p:cNvPr id="5" name="Footer Placeholder 4">
-            <a:extLst>
-              <a:ext uri="{FF2B5EF4-FFF2-40B4-BE49-F238E27FC236}">
-                <a16:creationId xmlns:a16="http://schemas.microsoft.com/office/drawing/2014/main" id="{CAF6CE07-0DBA-F7D9-F1AF-B9E35D2055C9}"/>
-              </a:ext>
-            </a:extLst>
-          </p:cNvPr>
-          <p:cNvSpPr>
-            <a:spLocks noGrp="1"/>
-          </p:cNvSpPr>
-          <p:nvPr>
-            <p:ph type="ftr" sz="quarter" idx="11"/>
-          </p:nvPr>
-        </p:nvSpPr>
-        <p:spPr/>
-        <p:txBody>
-          <a:bodyPr/>
-          <a:lstStyle/>
-          <a:p>
-            <a:r>
-              <a:rPr lang="en-US"/>
-              <a:t>ECED3403 Computer Architecture. Colin O'Flynn.</a:t>
-            </a:r>
-            <a:endParaRPr lang="en-CA"/>
-          </a:p>
-        </p:txBody>
-      </p:sp>
-      <p:sp>
-        <p:nvSpPr>
-          <p:cNvPr id="6" name="Slide Number Placeholder 5">
-            <a:extLst>
-              <a:ext uri="{FF2B5EF4-FFF2-40B4-BE49-F238E27FC236}">
-                <a16:creationId xmlns:a16="http://schemas.microsoft.com/office/drawing/2014/main" id="{2D5675BB-FBC9-5ABA-1481-89452EFF99F6}"/>
-              </a:ext>
-            </a:extLst>
-          </p:cNvPr>
-          <p:cNvSpPr>
-            <a:spLocks noGrp="1"/>
-          </p:cNvSpPr>
-          <p:nvPr>
-            <p:ph type="sldNum" sz="quarter" idx="12"/>
-          </p:nvPr>
-        </p:nvSpPr>
-        <p:spPr/>
-        <p:txBody>
-          <a:bodyPr/>
-          <a:lstStyle/>
-          <a:p>
-            <a:fld id="{CF25CC40-D0F6-4666-ABAA-DE78F621EF61}" type="slidenum">
-              <a:rPr lang="en-CA" smtClean="0"/>
-              <a:t>32</a:t>
-            </a:fld>
-            <a:endParaRPr lang="en-CA"/>
-          </a:p>
-        </p:txBody>
-      </p:sp>
-    </p:spTree>
-    <p:extLst>
-      <p:ext uri="{BB962C8B-B14F-4D97-AF65-F5344CB8AC3E}">
-        <p14:creationId xmlns:p14="http://schemas.microsoft.com/office/powerpoint/2010/main" val="672556732"/>
       </p:ext>
     </p:extLst>
   </p:cSld>
@@ -41642,7 +41844,7 @@
           <p:cNvPr id="2" name="Title 1">
             <a:extLst>
               <a:ext uri="{FF2B5EF4-FFF2-40B4-BE49-F238E27FC236}">
-                <a16:creationId xmlns:a16="http://schemas.microsoft.com/office/drawing/2014/main" id="{A14B5030-E4A3-71A4-DA67-19D5014445E0}"/>
+                <a16:creationId xmlns:a16="http://schemas.microsoft.com/office/drawing/2014/main" id="{6C650D31-33B3-A8F8-9D55-D06EA88B96B8}"/>
               </a:ext>
             </a:extLst>
           </p:cNvPr>
@@ -41660,7 +41862,90 @@
           <a:p>
             <a:r>
               <a:rPr lang="en-CA" dirty="0"/>
-              <a:t>STM32F3 DMA Hints</a:t>
+              <a:t>DMA Usage: High-Level</a:t>
+            </a:r>
+          </a:p>
+        </p:txBody>
+      </p:sp>
+      <p:sp>
+        <p:nvSpPr>
+          <p:cNvPr id="3" name="Content Placeholder 2">
+            <a:extLst>
+              <a:ext uri="{FF2B5EF4-FFF2-40B4-BE49-F238E27FC236}">
+                <a16:creationId xmlns:a16="http://schemas.microsoft.com/office/drawing/2014/main" id="{6A6FE54F-A506-F088-A16F-1A6AC7F34528}"/>
+              </a:ext>
+            </a:extLst>
+          </p:cNvPr>
+          <p:cNvSpPr>
+            <a:spLocks noGrp="1"/>
+          </p:cNvSpPr>
+          <p:nvPr>
+            <p:ph idx="1"/>
+          </p:nvPr>
+        </p:nvSpPr>
+        <p:spPr/>
+        <p:txBody>
+          <a:bodyPr/>
+          <a:lstStyle/>
+          <a:p>
+            <a:r>
+              <a:rPr lang="en-CA" dirty="0"/>
+              <a:t>Set source &amp; destination addresses</a:t>
+            </a:r>
+          </a:p>
+          <a:p>
+            <a:r>
+              <a:rPr lang="en-CA" dirty="0"/>
+              <a:t>Set if either address should automatically increment (normally </a:t>
+            </a:r>
+            <a:r>
+              <a:rPr lang="en-CA" b="1" dirty="0"/>
+              <a:t>not</a:t>
+            </a:r>
+            <a:r>
+              <a:rPr lang="en-CA" dirty="0"/>
+              <a:t> incrementing for peripherals, but </a:t>
+            </a:r>
+            <a:r>
+              <a:rPr lang="en-CA" b="1" dirty="0"/>
+              <a:t>do</a:t>
+            </a:r>
+            <a:r>
+              <a:rPr lang="en-CA" dirty="0"/>
+              <a:t> increment for memory)</a:t>
+            </a:r>
+          </a:p>
+          <a:p>
+            <a:r>
+              <a:rPr lang="en-CA" dirty="0"/>
+              <a:t>Set word size (e.g., normally 32 bits)</a:t>
+            </a:r>
+          </a:p>
+          <a:p>
+            <a:r>
+              <a:rPr lang="en-CA" dirty="0"/>
+              <a:t>Set number of </a:t>
+            </a:r>
+            <a:r>
+              <a:rPr lang="en-CA" b="1" dirty="0"/>
+              <a:t>words</a:t>
+            </a:r>
+            <a:r>
+              <a:rPr lang="en-CA" dirty="0"/>
+              <a:t> to transfer</a:t>
+            </a:r>
+          </a:p>
+          <a:p>
+            <a:pPr lvl="1"/>
+            <a:r>
+              <a:rPr lang="en-CA" dirty="0"/>
+              <a:t>Watch out for Bytes/Words confusion!</a:t>
+            </a:r>
+          </a:p>
+          <a:p>
+            <a:r>
+              <a:rPr lang="en-CA" dirty="0"/>
+              <a:t>Enable &amp; let it go!</a:t>
             </a:r>
           </a:p>
         </p:txBody>
@@ -41670,7 +41955,7 @@
           <p:cNvPr id="4" name="Date Placeholder 3">
             <a:extLst>
               <a:ext uri="{FF2B5EF4-FFF2-40B4-BE49-F238E27FC236}">
-                <a16:creationId xmlns:a16="http://schemas.microsoft.com/office/drawing/2014/main" id="{7CD63C12-C886-442E-13B4-DFC7D2538483}"/>
+                <a16:creationId xmlns:a16="http://schemas.microsoft.com/office/drawing/2014/main" id="{B1149A94-3236-71D5-64A3-EC39D7821014}"/>
               </a:ext>
             </a:extLst>
           </p:cNvPr>
@@ -41699,7 +41984,7 @@
           <p:cNvPr id="5" name="Footer Placeholder 4">
             <a:extLst>
               <a:ext uri="{FF2B5EF4-FFF2-40B4-BE49-F238E27FC236}">
-                <a16:creationId xmlns:a16="http://schemas.microsoft.com/office/drawing/2014/main" id="{F346688F-D4C8-CC8D-41D2-E2D520D1A277}"/>
+                <a16:creationId xmlns:a16="http://schemas.microsoft.com/office/drawing/2014/main" id="{CAF6CE07-0DBA-F7D9-F1AF-B9E35D2055C9}"/>
               </a:ext>
             </a:extLst>
           </p:cNvPr>
@@ -41728,7 +42013,7 @@
           <p:cNvPr id="6" name="Slide Number Placeholder 5">
             <a:extLst>
               <a:ext uri="{FF2B5EF4-FFF2-40B4-BE49-F238E27FC236}">
-                <a16:creationId xmlns:a16="http://schemas.microsoft.com/office/drawing/2014/main" id="{936B755A-CCAB-00B4-848A-2FC41EBA2C34}"/>
+                <a16:creationId xmlns:a16="http://schemas.microsoft.com/office/drawing/2014/main" id="{2D5675BB-FBC9-5ABA-1481-89452EFF99F6}"/>
               </a:ext>
             </a:extLst>
           </p:cNvPr>
@@ -41752,105 +42037,10 @@
           </a:p>
         </p:txBody>
       </p:sp>
-      <p:pic>
-        <p:nvPicPr>
-          <p:cNvPr id="8" name="Picture 7" descr="A close-up of a computer code&#10;&#10;AI-generated content may be incorrect.">
-            <a:extLst>
-              <a:ext uri="{FF2B5EF4-FFF2-40B4-BE49-F238E27FC236}">
-                <a16:creationId xmlns:a16="http://schemas.microsoft.com/office/drawing/2014/main" id="{15E7F312-6E8A-BF95-CE25-3D297F32E177}"/>
-              </a:ext>
-            </a:extLst>
-          </p:cNvPr>
-          <p:cNvPicPr>
-            <a:picLocks noChangeAspect="1"/>
-          </p:cNvPicPr>
-          <p:nvPr/>
-        </p:nvPicPr>
-        <p:blipFill>
-          <a:blip r:embed="rId2"/>
-          <a:stretch>
-            <a:fillRect/>
-          </a:stretch>
-        </p:blipFill>
-        <p:spPr>
-          <a:xfrm>
-            <a:off x="915271" y="1576212"/>
-            <a:ext cx="8808278" cy="2899128"/>
-          </a:xfrm>
-          <a:prstGeom prst="rect">
-            <a:avLst/>
-          </a:prstGeom>
-        </p:spPr>
-      </p:pic>
-      <p:sp>
-        <p:nvSpPr>
-          <p:cNvPr id="9" name="TextBox 8">
-            <a:extLst>
-              <a:ext uri="{FF2B5EF4-FFF2-40B4-BE49-F238E27FC236}">
-                <a16:creationId xmlns:a16="http://schemas.microsoft.com/office/drawing/2014/main" id="{6AF0D0EF-6601-68D1-2630-691AD2E70DA6}"/>
-              </a:ext>
-            </a:extLst>
-          </p:cNvPr>
-          <p:cNvSpPr txBox="1"/>
-          <p:nvPr/>
-        </p:nvSpPr>
-        <p:spPr>
-          <a:xfrm>
-            <a:off x="838200" y="4475340"/>
-            <a:ext cx="9865217" cy="646331"/>
-          </a:xfrm>
-          <a:prstGeom prst="rect">
-            <a:avLst/>
-          </a:prstGeom>
-          <a:noFill/>
-        </p:spPr>
-        <p:txBody>
-          <a:bodyPr wrap="square" rtlCol="0">
-            <a:spAutoFit/>
-          </a:bodyPr>
-          <a:lstStyle/>
-          <a:p>
-            <a:pPr marL="285750" indent="-285750">
-              <a:buFont typeface="Arial" panose="020B0604020202020204" pitchFamily="34" charset="0"/>
-              <a:buChar char="•"/>
-            </a:pPr>
-            <a:r>
-              <a:rPr lang="en-CA" dirty="0"/>
-              <a:t>CPAR / CMAR can be source/</a:t>
-            </a:r>
-            <a:r>
-              <a:rPr lang="en-CA" dirty="0" err="1"/>
-              <a:t>dest</a:t>
-            </a:r>
-            <a:r>
-              <a:rPr lang="en-CA" dirty="0"/>
-              <a:t> depending on “DIR” bit in CCR</a:t>
-            </a:r>
-          </a:p>
-          <a:p>
-            <a:pPr marL="285750" indent="-285750">
-              <a:buFont typeface="Arial" panose="020B0604020202020204" pitchFamily="34" charset="0"/>
-              <a:buChar char="•"/>
-            </a:pPr>
-            <a:r>
-              <a:rPr lang="en-CA" dirty="0"/>
-              <a:t>Watch out that not </a:t>
-            </a:r>
-            <a:r>
-              <a:rPr lang="en-CA" u="sng" dirty="0"/>
-              <a:t>all</a:t>
-            </a:r>
-            <a:r>
-              <a:rPr lang="en-CA" dirty="0"/>
-              <a:t> memory addresses are accessible (see next topic on TCM/CCM)</a:t>
-            </a:r>
-          </a:p>
-        </p:txBody>
-      </p:sp>
     </p:spTree>
     <p:extLst>
       <p:ext uri="{BB962C8B-B14F-4D97-AF65-F5344CB8AC3E}">
-        <p14:creationId xmlns:p14="http://schemas.microsoft.com/office/powerpoint/2010/main" val="3129335413"/>
+        <p14:creationId xmlns:p14="http://schemas.microsoft.com/office/powerpoint/2010/main" val="672556732"/>
       </p:ext>
     </p:extLst>
   </p:cSld>
@@ -41882,6 +42072,246 @@
           <p:cNvPr id="2" name="Title 1">
             <a:extLst>
               <a:ext uri="{FF2B5EF4-FFF2-40B4-BE49-F238E27FC236}">
+                <a16:creationId xmlns:a16="http://schemas.microsoft.com/office/drawing/2014/main" id="{A14B5030-E4A3-71A4-DA67-19D5014445E0}"/>
+              </a:ext>
+            </a:extLst>
+          </p:cNvPr>
+          <p:cNvSpPr>
+            <a:spLocks noGrp="1"/>
+          </p:cNvSpPr>
+          <p:nvPr>
+            <p:ph type="title"/>
+          </p:nvPr>
+        </p:nvSpPr>
+        <p:spPr/>
+        <p:txBody>
+          <a:bodyPr/>
+          <a:lstStyle/>
+          <a:p>
+            <a:r>
+              <a:rPr lang="en-CA" dirty="0"/>
+              <a:t>STM32F3 DMA Hints</a:t>
+            </a:r>
+          </a:p>
+        </p:txBody>
+      </p:sp>
+      <p:sp>
+        <p:nvSpPr>
+          <p:cNvPr id="4" name="Date Placeholder 3">
+            <a:extLst>
+              <a:ext uri="{FF2B5EF4-FFF2-40B4-BE49-F238E27FC236}">
+                <a16:creationId xmlns:a16="http://schemas.microsoft.com/office/drawing/2014/main" id="{7CD63C12-C886-442E-13B4-DFC7D2538483}"/>
+              </a:ext>
+            </a:extLst>
+          </p:cNvPr>
+          <p:cNvSpPr>
+            <a:spLocks noGrp="1"/>
+          </p:cNvSpPr>
+          <p:nvPr>
+            <p:ph type="dt" sz="half" idx="10"/>
+          </p:nvPr>
+        </p:nvSpPr>
+        <p:spPr/>
+        <p:txBody>
+          <a:bodyPr/>
+          <a:lstStyle/>
+          <a:p>
+            <a:fld id="{CDC1A3F7-612D-48D0-A380-86227BC8600F}" type="datetime1">
+              <a:rPr lang="en-CA" smtClean="0"/>
+              <a:t>2026-03-02</a:t>
+            </a:fld>
+            <a:endParaRPr lang="en-CA"/>
+          </a:p>
+        </p:txBody>
+      </p:sp>
+      <p:sp>
+        <p:nvSpPr>
+          <p:cNvPr id="5" name="Footer Placeholder 4">
+            <a:extLst>
+              <a:ext uri="{FF2B5EF4-FFF2-40B4-BE49-F238E27FC236}">
+                <a16:creationId xmlns:a16="http://schemas.microsoft.com/office/drawing/2014/main" id="{F346688F-D4C8-CC8D-41D2-E2D520D1A277}"/>
+              </a:ext>
+            </a:extLst>
+          </p:cNvPr>
+          <p:cNvSpPr>
+            <a:spLocks noGrp="1"/>
+          </p:cNvSpPr>
+          <p:nvPr>
+            <p:ph type="ftr" sz="quarter" idx="11"/>
+          </p:nvPr>
+        </p:nvSpPr>
+        <p:spPr/>
+        <p:txBody>
+          <a:bodyPr/>
+          <a:lstStyle/>
+          <a:p>
+            <a:r>
+              <a:rPr lang="en-US"/>
+              <a:t>ECED3403 Computer Architecture. Colin O'Flynn.</a:t>
+            </a:r>
+            <a:endParaRPr lang="en-CA"/>
+          </a:p>
+        </p:txBody>
+      </p:sp>
+      <p:sp>
+        <p:nvSpPr>
+          <p:cNvPr id="6" name="Slide Number Placeholder 5">
+            <a:extLst>
+              <a:ext uri="{FF2B5EF4-FFF2-40B4-BE49-F238E27FC236}">
+                <a16:creationId xmlns:a16="http://schemas.microsoft.com/office/drawing/2014/main" id="{936B755A-CCAB-00B4-848A-2FC41EBA2C34}"/>
+              </a:ext>
+            </a:extLst>
+          </p:cNvPr>
+          <p:cNvSpPr>
+            <a:spLocks noGrp="1"/>
+          </p:cNvSpPr>
+          <p:nvPr>
+            <p:ph type="sldNum" sz="quarter" idx="12"/>
+          </p:nvPr>
+        </p:nvSpPr>
+        <p:spPr/>
+        <p:txBody>
+          <a:bodyPr/>
+          <a:lstStyle/>
+          <a:p>
+            <a:fld id="{CF25CC40-D0F6-4666-ABAA-DE78F621EF61}" type="slidenum">
+              <a:rPr lang="en-CA" smtClean="0"/>
+              <a:t>34</a:t>
+            </a:fld>
+            <a:endParaRPr lang="en-CA"/>
+          </a:p>
+        </p:txBody>
+      </p:sp>
+      <p:pic>
+        <p:nvPicPr>
+          <p:cNvPr id="8" name="Picture 7" descr="A close-up of a computer code&#10;&#10;AI-generated content may be incorrect.">
+            <a:extLst>
+              <a:ext uri="{FF2B5EF4-FFF2-40B4-BE49-F238E27FC236}">
+                <a16:creationId xmlns:a16="http://schemas.microsoft.com/office/drawing/2014/main" id="{15E7F312-6E8A-BF95-CE25-3D297F32E177}"/>
+              </a:ext>
+            </a:extLst>
+          </p:cNvPr>
+          <p:cNvPicPr>
+            <a:picLocks noChangeAspect="1"/>
+          </p:cNvPicPr>
+          <p:nvPr/>
+        </p:nvPicPr>
+        <p:blipFill>
+          <a:blip r:embed="rId2"/>
+          <a:stretch>
+            <a:fillRect/>
+          </a:stretch>
+        </p:blipFill>
+        <p:spPr>
+          <a:xfrm>
+            <a:off x="915271" y="1576212"/>
+            <a:ext cx="8808278" cy="2899128"/>
+          </a:xfrm>
+          <a:prstGeom prst="rect">
+            <a:avLst/>
+          </a:prstGeom>
+        </p:spPr>
+      </p:pic>
+      <p:sp>
+        <p:nvSpPr>
+          <p:cNvPr id="9" name="TextBox 8">
+            <a:extLst>
+              <a:ext uri="{FF2B5EF4-FFF2-40B4-BE49-F238E27FC236}">
+                <a16:creationId xmlns:a16="http://schemas.microsoft.com/office/drawing/2014/main" id="{6AF0D0EF-6601-68D1-2630-691AD2E70DA6}"/>
+              </a:ext>
+            </a:extLst>
+          </p:cNvPr>
+          <p:cNvSpPr txBox="1"/>
+          <p:nvPr/>
+        </p:nvSpPr>
+        <p:spPr>
+          <a:xfrm>
+            <a:off x="838200" y="4475340"/>
+            <a:ext cx="9865217" cy="646331"/>
+          </a:xfrm>
+          <a:prstGeom prst="rect">
+            <a:avLst/>
+          </a:prstGeom>
+          <a:noFill/>
+        </p:spPr>
+        <p:txBody>
+          <a:bodyPr wrap="square" rtlCol="0">
+            <a:spAutoFit/>
+          </a:bodyPr>
+          <a:lstStyle/>
+          <a:p>
+            <a:pPr marL="285750" indent="-285750">
+              <a:buFont typeface="Arial" panose="020B0604020202020204" pitchFamily="34" charset="0"/>
+              <a:buChar char="•"/>
+            </a:pPr>
+            <a:r>
+              <a:rPr lang="en-CA" dirty="0"/>
+              <a:t>CPAR / CMAR can be source/</a:t>
+            </a:r>
+            <a:r>
+              <a:rPr lang="en-CA" dirty="0" err="1"/>
+              <a:t>dest</a:t>
+            </a:r>
+            <a:r>
+              <a:rPr lang="en-CA" dirty="0"/>
+              <a:t> depending on “DIR” bit in CCR</a:t>
+            </a:r>
+          </a:p>
+          <a:p>
+            <a:pPr marL="285750" indent="-285750">
+              <a:buFont typeface="Arial" panose="020B0604020202020204" pitchFamily="34" charset="0"/>
+              <a:buChar char="•"/>
+            </a:pPr>
+            <a:r>
+              <a:rPr lang="en-CA" dirty="0"/>
+              <a:t>Watch out that not </a:t>
+            </a:r>
+            <a:r>
+              <a:rPr lang="en-CA" u="sng" dirty="0"/>
+              <a:t>all</a:t>
+            </a:r>
+            <a:r>
+              <a:rPr lang="en-CA" dirty="0"/>
+              <a:t> memory addresses are accessible (see next topic on TCM/CCM)</a:t>
+            </a:r>
+          </a:p>
+        </p:txBody>
+      </p:sp>
+    </p:spTree>
+    <p:extLst>
+      <p:ext uri="{BB962C8B-B14F-4D97-AF65-F5344CB8AC3E}">
+        <p14:creationId xmlns:p14="http://schemas.microsoft.com/office/powerpoint/2010/main" val="3129335413"/>
+      </p:ext>
+    </p:extLst>
+  </p:cSld>
+  <p:clrMapOvr>
+    <a:masterClrMapping/>
+  </p:clrMapOvr>
+</p:sld>
+</file>
+
+<file path=ppt/slides/slide35.xml><?xml version="1.0" encoding="utf-8"?>
+<p:sld xmlns:a="http://schemas.openxmlformats.org/drawingml/2006/main" xmlns:r="http://schemas.openxmlformats.org/officeDocument/2006/relationships" xmlns:p="http://schemas.openxmlformats.org/presentationml/2006/main">
+  <p:cSld>
+    <p:spTree>
+      <p:nvGrpSpPr>
+        <p:cNvPr id="1" name=""/>
+        <p:cNvGrpSpPr/>
+        <p:nvPr/>
+      </p:nvGrpSpPr>
+      <p:grpSpPr>
+        <a:xfrm>
+          <a:off x="0" y="0"/>
+          <a:ext cx="0" cy="0"/>
+          <a:chOff x="0" y="0"/>
+          <a:chExt cx="0" cy="0"/>
+        </a:xfrm>
+      </p:grpSpPr>
+      <p:sp>
+        <p:nvSpPr>
+          <p:cNvPr id="2" name="Title 1">
+            <a:extLst>
+              <a:ext uri="{FF2B5EF4-FFF2-40B4-BE49-F238E27FC236}">
                 <a16:creationId xmlns:a16="http://schemas.microsoft.com/office/drawing/2014/main" id="{C2B56C6B-0CF8-5743-BFED-0746E4C426AE}"/>
               </a:ext>
             </a:extLst>
@@ -42047,7 +42477,7 @@
           <a:p>
             <a:fld id="{CF25CC40-D0F6-4666-ABAA-DE78F621EF61}" type="slidenum">
               <a:rPr lang="en-CA" smtClean="0"/>
-              <a:t>34</a:t>
+              <a:t>35</a:t>
             </a:fld>
             <a:endParaRPr lang="en-CA"/>
           </a:p>
@@ -42096,7 +42526,213 @@
 </p:sld>
 </file>
 
-<file path=ppt/slides/slide35.xml><?xml version="1.0" encoding="utf-8"?>
+<file path=ppt/slides/slide36.xml><?xml version="1.0" encoding="utf-8"?>
+<p:sld xmlns:a="http://schemas.openxmlformats.org/drawingml/2006/main" xmlns:r="http://schemas.openxmlformats.org/officeDocument/2006/relationships" xmlns:p="http://schemas.openxmlformats.org/presentationml/2006/main">
+  <p:cSld>
+    <p:spTree>
+      <p:nvGrpSpPr>
+        <p:cNvPr id="1" name=""/>
+        <p:cNvGrpSpPr/>
+        <p:nvPr/>
+      </p:nvGrpSpPr>
+      <p:grpSpPr>
+        <a:xfrm>
+          <a:off x="0" y="0"/>
+          <a:ext cx="0" cy="0"/>
+          <a:chOff x="0" y="0"/>
+          <a:chExt cx="0" cy="0"/>
+        </a:xfrm>
+      </p:grpSpPr>
+      <p:sp>
+        <p:nvSpPr>
+          <p:cNvPr id="2" name="Title 1">
+            <a:extLst>
+              <a:ext uri="{FF2B5EF4-FFF2-40B4-BE49-F238E27FC236}">
+                <a16:creationId xmlns:a16="http://schemas.microsoft.com/office/drawing/2014/main" id="{6957DE8F-F26F-FFD2-F97A-8C2542180A6D}"/>
+              </a:ext>
+            </a:extLst>
+          </p:cNvPr>
+          <p:cNvSpPr>
+            <a:spLocks noGrp="1"/>
+          </p:cNvSpPr>
+          <p:nvPr>
+            <p:ph type="title"/>
+          </p:nvPr>
+        </p:nvSpPr>
+        <p:spPr/>
+        <p:txBody>
+          <a:bodyPr/>
+          <a:lstStyle/>
+          <a:p>
+            <a:r>
+              <a:rPr lang="en-CA" dirty="0"/>
+              <a:t>DMA for Data Packing</a:t>
+            </a:r>
+          </a:p>
+        </p:txBody>
+      </p:sp>
+      <p:sp>
+        <p:nvSpPr>
+          <p:cNvPr id="3" name="Content Placeholder 2">
+            <a:extLst>
+              <a:ext uri="{FF2B5EF4-FFF2-40B4-BE49-F238E27FC236}">
+                <a16:creationId xmlns:a16="http://schemas.microsoft.com/office/drawing/2014/main" id="{9E85793C-2800-05CE-AD56-FB5C3FFEA4F1}"/>
+              </a:ext>
+            </a:extLst>
+          </p:cNvPr>
+          <p:cNvSpPr>
+            <a:spLocks noGrp="1"/>
+          </p:cNvSpPr>
+          <p:nvPr>
+            <p:ph idx="1"/>
+          </p:nvPr>
+        </p:nvSpPr>
+        <p:spPr/>
+        <p:txBody>
+          <a:bodyPr/>
+          <a:lstStyle/>
+          <a:p>
+            <a:r>
+              <a:rPr lang="en-CA" dirty="0"/>
+              <a:t>Sometimes you use this on purpose:</a:t>
+            </a:r>
+          </a:p>
+          <a:p>
+            <a:pPr lvl="1"/>
+            <a:r>
+              <a:rPr lang="en-CA" dirty="0"/>
+              <a:t>8-bit or 16-bit data coming in from a peripheral</a:t>
+            </a:r>
+          </a:p>
+          <a:p>
+            <a:pPr lvl="1"/>
+            <a:r>
+              <a:rPr lang="en-CA" dirty="0"/>
+              <a:t>You want this </a:t>
+            </a:r>
+            <a:r>
+              <a:rPr lang="en-CA" u="sng" dirty="0"/>
+              <a:t>packed</a:t>
+            </a:r>
+            <a:r>
+              <a:rPr lang="en-CA" dirty="0"/>
+              <a:t> into 32-bit array for memory efficiency</a:t>
+            </a:r>
+          </a:p>
+          <a:p>
+            <a:pPr lvl="2"/>
+            <a:r>
+              <a:rPr lang="en-CA" dirty="0"/>
+              <a:t>DMA can do that automatically!</a:t>
+            </a:r>
+          </a:p>
+          <a:p>
+            <a:pPr lvl="1"/>
+            <a:endParaRPr lang="en-CA" dirty="0"/>
+          </a:p>
+        </p:txBody>
+      </p:sp>
+      <p:sp>
+        <p:nvSpPr>
+          <p:cNvPr id="4" name="Date Placeholder 3">
+            <a:extLst>
+              <a:ext uri="{FF2B5EF4-FFF2-40B4-BE49-F238E27FC236}">
+                <a16:creationId xmlns:a16="http://schemas.microsoft.com/office/drawing/2014/main" id="{AC8C0584-8984-9301-6295-7DBF222D51EE}"/>
+              </a:ext>
+            </a:extLst>
+          </p:cNvPr>
+          <p:cNvSpPr>
+            <a:spLocks noGrp="1"/>
+          </p:cNvSpPr>
+          <p:nvPr>
+            <p:ph type="dt" sz="half" idx="10"/>
+          </p:nvPr>
+        </p:nvSpPr>
+        <p:spPr/>
+        <p:txBody>
+          <a:bodyPr/>
+          <a:lstStyle/>
+          <a:p>
+            <a:fld id="{CDC1A3F7-612D-48D0-A380-86227BC8600F}" type="datetime1">
+              <a:rPr lang="en-CA" smtClean="0"/>
+              <a:t>2026-03-02</a:t>
+            </a:fld>
+            <a:endParaRPr lang="en-CA"/>
+          </a:p>
+        </p:txBody>
+      </p:sp>
+      <p:sp>
+        <p:nvSpPr>
+          <p:cNvPr id="5" name="Footer Placeholder 4">
+            <a:extLst>
+              <a:ext uri="{FF2B5EF4-FFF2-40B4-BE49-F238E27FC236}">
+                <a16:creationId xmlns:a16="http://schemas.microsoft.com/office/drawing/2014/main" id="{C0EA2149-C2FA-AAA6-4572-5C68FC984A43}"/>
+              </a:ext>
+            </a:extLst>
+          </p:cNvPr>
+          <p:cNvSpPr>
+            <a:spLocks noGrp="1"/>
+          </p:cNvSpPr>
+          <p:nvPr>
+            <p:ph type="ftr" sz="quarter" idx="11"/>
+          </p:nvPr>
+        </p:nvSpPr>
+        <p:spPr/>
+        <p:txBody>
+          <a:bodyPr/>
+          <a:lstStyle/>
+          <a:p>
+            <a:r>
+              <a:rPr lang="en-US"/>
+              <a:t>ECED3403 Computer Architecture. Colin O'Flynn.</a:t>
+            </a:r>
+            <a:endParaRPr lang="en-CA"/>
+          </a:p>
+        </p:txBody>
+      </p:sp>
+      <p:sp>
+        <p:nvSpPr>
+          <p:cNvPr id="6" name="Slide Number Placeholder 5">
+            <a:extLst>
+              <a:ext uri="{FF2B5EF4-FFF2-40B4-BE49-F238E27FC236}">
+                <a16:creationId xmlns:a16="http://schemas.microsoft.com/office/drawing/2014/main" id="{326B64EE-ED10-6B3F-9BC1-DC61EC3C7B75}"/>
+              </a:ext>
+            </a:extLst>
+          </p:cNvPr>
+          <p:cNvSpPr>
+            <a:spLocks noGrp="1"/>
+          </p:cNvSpPr>
+          <p:nvPr>
+            <p:ph type="sldNum" sz="quarter" idx="12"/>
+          </p:nvPr>
+        </p:nvSpPr>
+        <p:spPr/>
+        <p:txBody>
+          <a:bodyPr/>
+          <a:lstStyle/>
+          <a:p>
+            <a:fld id="{CF25CC40-D0F6-4666-ABAA-DE78F621EF61}" type="slidenum">
+              <a:rPr lang="en-CA" smtClean="0"/>
+              <a:t>36</a:t>
+            </a:fld>
+            <a:endParaRPr lang="en-CA"/>
+          </a:p>
+        </p:txBody>
+      </p:sp>
+    </p:spTree>
+    <p:extLst>
+      <p:ext uri="{BB962C8B-B14F-4D97-AF65-F5344CB8AC3E}">
+        <p14:creationId xmlns:p14="http://schemas.microsoft.com/office/powerpoint/2010/main" val="3269609292"/>
+      </p:ext>
+    </p:extLst>
+  </p:cSld>
+  <p:clrMapOvr>
+    <a:masterClrMapping/>
+  </p:clrMapOvr>
+</p:sld>
+</file>
+
+<file path=ppt/slides/slide37.xml><?xml version="1.0" encoding="utf-8"?>
 <p:sld xmlns:a="http://schemas.openxmlformats.org/drawingml/2006/main" xmlns:r="http://schemas.openxmlformats.org/officeDocument/2006/relationships" xmlns:p="http://schemas.openxmlformats.org/presentationml/2006/main">
   <p:cSld>
     <p:spTree>
@@ -42327,7 +42963,7 @@
           <a:p>
             <a:fld id="{CF25CC40-D0F6-4666-ABAA-DE78F621EF61}" type="slidenum">
               <a:rPr lang="en-CA" smtClean="0"/>
-              <a:t>35</a:t>
+              <a:t>37</a:t>
             </a:fld>
             <a:endParaRPr lang="en-CA"/>
           </a:p>
@@ -42346,7 +42982,156 @@
 </p:sld>
 </file>
 
-<file path=ppt/slides/slide36.xml><?xml version="1.0" encoding="utf-8"?>
+<file path=ppt/slides/slide38.xml><?xml version="1.0" encoding="utf-8"?>
+<p:sld xmlns:a="http://schemas.openxmlformats.org/drawingml/2006/main" xmlns:r="http://schemas.openxmlformats.org/officeDocument/2006/relationships" xmlns:p="http://schemas.openxmlformats.org/presentationml/2006/main">
+  <p:cSld>
+    <p:spTree>
+      <p:nvGrpSpPr>
+        <p:cNvPr id="1" name=""/>
+        <p:cNvGrpSpPr/>
+        <p:nvPr/>
+      </p:nvGrpSpPr>
+      <p:grpSpPr>
+        <a:xfrm>
+          <a:off x="0" y="0"/>
+          <a:ext cx="0" cy="0"/>
+          <a:chOff x="0" y="0"/>
+          <a:chExt cx="0" cy="0"/>
+        </a:xfrm>
+      </p:grpSpPr>
+      <p:sp>
+        <p:nvSpPr>
+          <p:cNvPr id="4" name="Date Placeholder 3">
+            <a:extLst>
+              <a:ext uri="{FF2B5EF4-FFF2-40B4-BE49-F238E27FC236}">
+                <a16:creationId xmlns:a16="http://schemas.microsoft.com/office/drawing/2014/main" id="{07F817E1-5B10-5114-9600-89A2B0D23FDB}"/>
+              </a:ext>
+            </a:extLst>
+          </p:cNvPr>
+          <p:cNvSpPr>
+            <a:spLocks noGrp="1"/>
+          </p:cNvSpPr>
+          <p:nvPr>
+            <p:ph type="dt" sz="half" idx="10"/>
+          </p:nvPr>
+        </p:nvSpPr>
+        <p:spPr/>
+        <p:txBody>
+          <a:bodyPr/>
+          <a:lstStyle/>
+          <a:p>
+            <a:fld id="{CDC1A3F7-612D-48D0-A380-86227BC8600F}" type="datetime1">
+              <a:rPr lang="en-CA" smtClean="0"/>
+              <a:t>2026-03-02</a:t>
+            </a:fld>
+            <a:endParaRPr lang="en-CA"/>
+          </a:p>
+        </p:txBody>
+      </p:sp>
+      <p:sp>
+        <p:nvSpPr>
+          <p:cNvPr id="5" name="Footer Placeholder 4">
+            <a:extLst>
+              <a:ext uri="{FF2B5EF4-FFF2-40B4-BE49-F238E27FC236}">
+                <a16:creationId xmlns:a16="http://schemas.microsoft.com/office/drawing/2014/main" id="{56A5FD83-6CD7-BAA8-8F7C-CC77441D13B1}"/>
+              </a:ext>
+            </a:extLst>
+          </p:cNvPr>
+          <p:cNvSpPr>
+            <a:spLocks noGrp="1"/>
+          </p:cNvSpPr>
+          <p:nvPr>
+            <p:ph type="ftr" sz="quarter" idx="11"/>
+          </p:nvPr>
+        </p:nvSpPr>
+        <p:spPr/>
+        <p:txBody>
+          <a:bodyPr/>
+          <a:lstStyle/>
+          <a:p>
+            <a:r>
+              <a:rPr lang="en-US"/>
+              <a:t>ECED3403 Computer Architecture. Colin O'Flynn.</a:t>
+            </a:r>
+            <a:endParaRPr lang="en-CA"/>
+          </a:p>
+        </p:txBody>
+      </p:sp>
+      <p:sp>
+        <p:nvSpPr>
+          <p:cNvPr id="6" name="Slide Number Placeholder 5">
+            <a:extLst>
+              <a:ext uri="{FF2B5EF4-FFF2-40B4-BE49-F238E27FC236}">
+                <a16:creationId xmlns:a16="http://schemas.microsoft.com/office/drawing/2014/main" id="{4BD1C84F-FCBD-AD9A-FB1F-DEF94C161469}"/>
+              </a:ext>
+            </a:extLst>
+          </p:cNvPr>
+          <p:cNvSpPr>
+            <a:spLocks noGrp="1"/>
+          </p:cNvSpPr>
+          <p:nvPr>
+            <p:ph type="sldNum" sz="quarter" idx="12"/>
+          </p:nvPr>
+        </p:nvSpPr>
+        <p:spPr/>
+        <p:txBody>
+          <a:bodyPr/>
+          <a:lstStyle/>
+          <a:p>
+            <a:fld id="{CF25CC40-D0F6-4666-ABAA-DE78F621EF61}" type="slidenum">
+              <a:rPr lang="en-CA" smtClean="0"/>
+              <a:t>38</a:t>
+            </a:fld>
+            <a:endParaRPr lang="en-CA"/>
+          </a:p>
+        </p:txBody>
+      </p:sp>
+      <p:pic>
+        <p:nvPicPr>
+          <p:cNvPr id="7" name="Content Placeholder 7" descr="A diagram of a computer system&#10;&#10;AI-generated content may be incorrect.">
+            <a:extLst>
+              <a:ext uri="{FF2B5EF4-FFF2-40B4-BE49-F238E27FC236}">
+                <a16:creationId xmlns:a16="http://schemas.microsoft.com/office/drawing/2014/main" id="{AD4271DD-FDF8-9D4F-5961-BCEB402747C7}"/>
+              </a:ext>
+            </a:extLst>
+          </p:cNvPr>
+          <p:cNvPicPr>
+            <a:picLocks noGrp="1" noChangeAspect="1"/>
+          </p:cNvPicPr>
+          <p:nvPr>
+            <p:ph idx="1"/>
+          </p:nvPr>
+        </p:nvPicPr>
+        <p:blipFill>
+          <a:blip r:embed="rId2"/>
+          <a:stretch>
+            <a:fillRect/>
+          </a:stretch>
+        </p:blipFill>
+        <p:spPr>
+          <a:xfrm>
+            <a:off x="1421886" y="428266"/>
+            <a:ext cx="9003562" cy="5820019"/>
+          </a:xfrm>
+          <a:prstGeom prst="rect">
+            <a:avLst/>
+          </a:prstGeom>
+        </p:spPr>
+      </p:pic>
+    </p:spTree>
+    <p:extLst>
+      <p:ext uri="{BB962C8B-B14F-4D97-AF65-F5344CB8AC3E}">
+        <p14:creationId xmlns:p14="http://schemas.microsoft.com/office/powerpoint/2010/main" val="2694260877"/>
+      </p:ext>
+    </p:extLst>
+  </p:cSld>
+  <p:clrMapOvr>
+    <a:masterClrMapping/>
+  </p:clrMapOvr>
+</p:sld>
+</file>
+
+<file path=ppt/slides/slide39.xml><?xml version="1.0" encoding="utf-8"?>
 <p:sld xmlns:a="http://schemas.openxmlformats.org/drawingml/2006/main" xmlns:r="http://schemas.openxmlformats.org/officeDocument/2006/relationships" xmlns:p="http://schemas.openxmlformats.org/presentationml/2006/main">
   <p:cSld>
     <p:spTree>
@@ -42472,7 +43257,7 @@
           <a:p>
             <a:fld id="{CF25CC40-D0F6-4666-ABAA-DE78F621EF61}" type="slidenum">
               <a:rPr lang="en-CA" smtClean="0"/>
-              <a:t>36</a:t>
+              <a:t>39</a:t>
             </a:fld>
             <a:endParaRPr lang="en-CA"/>
           </a:p>
@@ -42540,601 +43325,6 @@
 </p:sld>
 </file>
 
-<file path=ppt/slides/slide37.xml><?xml version="1.0" encoding="utf-8"?>
-<p:sld xmlns:a="http://schemas.openxmlformats.org/drawingml/2006/main" xmlns:r="http://schemas.openxmlformats.org/officeDocument/2006/relationships" xmlns:p="http://schemas.openxmlformats.org/presentationml/2006/main">
-  <p:cSld>
-    <p:spTree>
-      <p:nvGrpSpPr>
-        <p:cNvPr id="1" name=""/>
-        <p:cNvGrpSpPr/>
-        <p:nvPr/>
-      </p:nvGrpSpPr>
-      <p:grpSpPr>
-        <a:xfrm>
-          <a:off x="0" y="0"/>
-          <a:ext cx="0" cy="0"/>
-          <a:chOff x="0" y="0"/>
-          <a:chExt cx="0" cy="0"/>
-        </a:xfrm>
-      </p:grpSpPr>
-      <p:sp>
-        <p:nvSpPr>
-          <p:cNvPr id="2" name="Title 1">
-            <a:extLst>
-              <a:ext uri="{FF2B5EF4-FFF2-40B4-BE49-F238E27FC236}">
-                <a16:creationId xmlns:a16="http://schemas.microsoft.com/office/drawing/2014/main" id="{B2B8F2EC-C2FB-44F6-2BD8-F3830B4119CA}"/>
-              </a:ext>
-            </a:extLst>
-          </p:cNvPr>
-          <p:cNvSpPr>
-            <a:spLocks noGrp="1"/>
-          </p:cNvSpPr>
-          <p:nvPr>
-            <p:ph type="title"/>
-          </p:nvPr>
-        </p:nvSpPr>
-        <p:spPr/>
-        <p:txBody>
-          <a:bodyPr/>
-          <a:lstStyle/>
-          <a:p>
-            <a:r>
-              <a:rPr lang="en-CA" dirty="0"/>
-              <a:t>Simple External Busses: SRAM</a:t>
-            </a:r>
-          </a:p>
-        </p:txBody>
-      </p:sp>
-      <p:sp>
-        <p:nvSpPr>
-          <p:cNvPr id="3" name="Content Placeholder 2">
-            <a:extLst>
-              <a:ext uri="{FF2B5EF4-FFF2-40B4-BE49-F238E27FC236}">
-                <a16:creationId xmlns:a16="http://schemas.microsoft.com/office/drawing/2014/main" id="{B987AC14-31BB-3CB8-7BDE-9F467D5438E9}"/>
-              </a:ext>
-            </a:extLst>
-          </p:cNvPr>
-          <p:cNvSpPr>
-            <a:spLocks noGrp="1"/>
-          </p:cNvSpPr>
-          <p:nvPr>
-            <p:ph idx="1"/>
-          </p:nvPr>
-        </p:nvSpPr>
-        <p:spPr>
-          <a:xfrm>
-            <a:off x="664336" y="5825621"/>
-            <a:ext cx="10515600" cy="594497"/>
-          </a:xfrm>
-        </p:spPr>
-        <p:txBody>
-          <a:bodyPr>
-            <a:normAutofit/>
-          </a:bodyPr>
-          <a:lstStyle/>
-          <a:p>
-            <a:r>
-              <a:rPr lang="en-CA" sz="1800" dirty="0">
-                <a:hlinkClick r:id="rId2"/>
-              </a:rPr>
-              <a:t>https://ww1.microchip.com/downloads/en/DeviceDoc/Atmel-6430-32-bit-Cortex-M3-Microcontroller-SAM3U4-SAM3U2-SAM3U1_Datasheet.pdf</a:t>
-            </a:r>
-            <a:r>
-              <a:rPr lang="en-CA" sz="1800" dirty="0"/>
-              <a:t> </a:t>
-            </a:r>
-          </a:p>
-        </p:txBody>
-      </p:sp>
-      <p:sp>
-        <p:nvSpPr>
-          <p:cNvPr id="4" name="Date Placeholder 3">
-            <a:extLst>
-              <a:ext uri="{FF2B5EF4-FFF2-40B4-BE49-F238E27FC236}">
-                <a16:creationId xmlns:a16="http://schemas.microsoft.com/office/drawing/2014/main" id="{D9099A27-7D53-407F-3C80-B3B91157CA68}"/>
-              </a:ext>
-            </a:extLst>
-          </p:cNvPr>
-          <p:cNvSpPr>
-            <a:spLocks noGrp="1"/>
-          </p:cNvSpPr>
-          <p:nvPr>
-            <p:ph type="dt" sz="half" idx="10"/>
-          </p:nvPr>
-        </p:nvSpPr>
-        <p:spPr/>
-        <p:txBody>
-          <a:bodyPr/>
-          <a:lstStyle/>
-          <a:p>
-            <a:fld id="{CDC1A3F7-612D-48D0-A380-86227BC8600F}" type="datetime1">
-              <a:rPr lang="en-CA" smtClean="0"/>
-              <a:t>2026-03-02</a:t>
-            </a:fld>
-            <a:endParaRPr lang="en-CA"/>
-          </a:p>
-        </p:txBody>
-      </p:sp>
-      <p:sp>
-        <p:nvSpPr>
-          <p:cNvPr id="5" name="Footer Placeholder 4">
-            <a:extLst>
-              <a:ext uri="{FF2B5EF4-FFF2-40B4-BE49-F238E27FC236}">
-                <a16:creationId xmlns:a16="http://schemas.microsoft.com/office/drawing/2014/main" id="{98BBCC7F-7E67-F152-34CD-AAB14FD68CFE}"/>
-              </a:ext>
-            </a:extLst>
-          </p:cNvPr>
-          <p:cNvSpPr>
-            <a:spLocks noGrp="1"/>
-          </p:cNvSpPr>
-          <p:nvPr>
-            <p:ph type="ftr" sz="quarter" idx="11"/>
-          </p:nvPr>
-        </p:nvSpPr>
-        <p:spPr/>
-        <p:txBody>
-          <a:bodyPr/>
-          <a:lstStyle/>
-          <a:p>
-            <a:r>
-              <a:rPr lang="en-US"/>
-              <a:t>ECED3403 Computer Architecture. Colin O'Flynn.</a:t>
-            </a:r>
-            <a:endParaRPr lang="en-CA"/>
-          </a:p>
-        </p:txBody>
-      </p:sp>
-      <p:sp>
-        <p:nvSpPr>
-          <p:cNvPr id="6" name="Slide Number Placeholder 5">
-            <a:extLst>
-              <a:ext uri="{FF2B5EF4-FFF2-40B4-BE49-F238E27FC236}">
-                <a16:creationId xmlns:a16="http://schemas.microsoft.com/office/drawing/2014/main" id="{0EBE7669-2320-723F-C3DD-CB023D30D58C}"/>
-              </a:ext>
-            </a:extLst>
-          </p:cNvPr>
-          <p:cNvSpPr>
-            <a:spLocks noGrp="1"/>
-          </p:cNvSpPr>
-          <p:nvPr>
-            <p:ph type="sldNum" sz="quarter" idx="12"/>
-          </p:nvPr>
-        </p:nvSpPr>
-        <p:spPr/>
-        <p:txBody>
-          <a:bodyPr/>
-          <a:lstStyle/>
-          <a:p>
-            <a:fld id="{CF25CC40-D0F6-4666-ABAA-DE78F621EF61}" type="slidenum">
-              <a:rPr lang="en-CA" smtClean="0"/>
-              <a:t>37</a:t>
-            </a:fld>
-            <a:endParaRPr lang="en-CA"/>
-          </a:p>
-        </p:txBody>
-      </p:sp>
-      <p:pic>
-        <p:nvPicPr>
-          <p:cNvPr id="8" name="Picture 7" descr="A diagram of a computer&#10;&#10;AI-generated content may be incorrect.">
-            <a:extLst>
-              <a:ext uri="{FF2B5EF4-FFF2-40B4-BE49-F238E27FC236}">
-                <a16:creationId xmlns:a16="http://schemas.microsoft.com/office/drawing/2014/main" id="{BE6E356A-1BD0-2DF8-3B78-B884CB28C2B0}"/>
-              </a:ext>
-            </a:extLst>
-          </p:cNvPr>
-          <p:cNvPicPr>
-            <a:picLocks noChangeAspect="1"/>
-          </p:cNvPicPr>
-          <p:nvPr/>
-        </p:nvPicPr>
-        <p:blipFill>
-          <a:blip r:embed="rId3"/>
-          <a:stretch>
-            <a:fillRect/>
-          </a:stretch>
-        </p:blipFill>
-        <p:spPr>
-          <a:xfrm>
-            <a:off x="1706451" y="1563321"/>
-            <a:ext cx="7572777" cy="4250675"/>
-          </a:xfrm>
-          <a:prstGeom prst="rect">
-            <a:avLst/>
-          </a:prstGeom>
-        </p:spPr>
-      </p:pic>
-    </p:spTree>
-    <p:extLst>
-      <p:ext uri="{BB962C8B-B14F-4D97-AF65-F5344CB8AC3E}">
-        <p14:creationId xmlns:p14="http://schemas.microsoft.com/office/powerpoint/2010/main" val="2006870802"/>
-      </p:ext>
-    </p:extLst>
-  </p:cSld>
-  <p:clrMapOvr>
-    <a:masterClrMapping/>
-  </p:clrMapOvr>
-</p:sld>
-</file>
-
-<file path=ppt/slides/slide38.xml><?xml version="1.0" encoding="utf-8"?>
-<p:sld xmlns:a="http://schemas.openxmlformats.org/drawingml/2006/main" xmlns:r="http://schemas.openxmlformats.org/officeDocument/2006/relationships" xmlns:p="http://schemas.openxmlformats.org/presentationml/2006/main">
-  <p:cSld>
-    <p:spTree>
-      <p:nvGrpSpPr>
-        <p:cNvPr id="1" name=""/>
-        <p:cNvGrpSpPr/>
-        <p:nvPr/>
-      </p:nvGrpSpPr>
-      <p:grpSpPr>
-        <a:xfrm>
-          <a:off x="0" y="0"/>
-          <a:ext cx="0" cy="0"/>
-          <a:chOff x="0" y="0"/>
-          <a:chExt cx="0" cy="0"/>
-        </a:xfrm>
-      </p:grpSpPr>
-      <p:sp>
-        <p:nvSpPr>
-          <p:cNvPr id="2" name="Title 1">
-            <a:extLst>
-              <a:ext uri="{FF2B5EF4-FFF2-40B4-BE49-F238E27FC236}">
-                <a16:creationId xmlns:a16="http://schemas.microsoft.com/office/drawing/2014/main" id="{17AA9C32-9ECE-96B3-8394-D3A6F4C80C4A}"/>
-              </a:ext>
-            </a:extLst>
-          </p:cNvPr>
-          <p:cNvSpPr>
-            <a:spLocks noGrp="1"/>
-          </p:cNvSpPr>
-          <p:nvPr>
-            <p:ph type="title"/>
-          </p:nvPr>
-        </p:nvSpPr>
-        <p:spPr/>
-        <p:txBody>
-          <a:bodyPr/>
-          <a:lstStyle/>
-          <a:p>
-            <a:r>
-              <a:rPr lang="en-CA" dirty="0"/>
-              <a:t>Synchronous Bus</a:t>
-            </a:r>
-          </a:p>
-        </p:txBody>
-      </p:sp>
-      <p:sp>
-        <p:nvSpPr>
-          <p:cNvPr id="3" name="Content Placeholder 2">
-            <a:extLst>
-              <a:ext uri="{FF2B5EF4-FFF2-40B4-BE49-F238E27FC236}">
-                <a16:creationId xmlns:a16="http://schemas.microsoft.com/office/drawing/2014/main" id="{06DDF808-E22A-222A-A67B-FF6753AEC2D3}"/>
-              </a:ext>
-            </a:extLst>
-          </p:cNvPr>
-          <p:cNvSpPr>
-            <a:spLocks noGrp="1"/>
-          </p:cNvSpPr>
-          <p:nvPr>
-            <p:ph idx="1"/>
-          </p:nvPr>
-        </p:nvSpPr>
-        <p:spPr/>
-        <p:txBody>
-          <a:bodyPr/>
-          <a:lstStyle/>
-          <a:p>
-            <a:r>
-              <a:rPr lang="en-CA" dirty="0"/>
-              <a:t>Synchronous buses will have a </a:t>
-            </a:r>
-            <a:r>
-              <a:rPr lang="en-CA" u="sng" dirty="0"/>
-              <a:t>clock</a:t>
-            </a:r>
-          </a:p>
-          <a:p>
-            <a:r>
-              <a:rPr lang="en-CA" dirty="0"/>
-              <a:t>All data &amp; control signals only read on the </a:t>
-            </a:r>
-            <a:r>
-              <a:rPr lang="en-CA" u="sng" dirty="0"/>
-              <a:t>clock edge</a:t>
-            </a:r>
-            <a:endParaRPr lang="en-CA" dirty="0"/>
-          </a:p>
-          <a:p>
-            <a:r>
-              <a:rPr lang="en-CA" dirty="0"/>
-              <a:t>Normally strict timing requirements</a:t>
-            </a:r>
-          </a:p>
-        </p:txBody>
-      </p:sp>
-      <p:sp>
-        <p:nvSpPr>
-          <p:cNvPr id="4" name="Date Placeholder 3">
-            <a:extLst>
-              <a:ext uri="{FF2B5EF4-FFF2-40B4-BE49-F238E27FC236}">
-                <a16:creationId xmlns:a16="http://schemas.microsoft.com/office/drawing/2014/main" id="{C9ED80E8-EC08-190E-8089-52F8FD9B93EC}"/>
-              </a:ext>
-            </a:extLst>
-          </p:cNvPr>
-          <p:cNvSpPr>
-            <a:spLocks noGrp="1"/>
-          </p:cNvSpPr>
-          <p:nvPr>
-            <p:ph type="dt" sz="half" idx="10"/>
-          </p:nvPr>
-        </p:nvSpPr>
-        <p:spPr/>
-        <p:txBody>
-          <a:bodyPr/>
-          <a:lstStyle/>
-          <a:p>
-            <a:fld id="{CDC1A3F7-612D-48D0-A380-86227BC8600F}" type="datetime1">
-              <a:rPr lang="en-CA" smtClean="0"/>
-              <a:t>2026-03-02</a:t>
-            </a:fld>
-            <a:endParaRPr lang="en-CA"/>
-          </a:p>
-        </p:txBody>
-      </p:sp>
-      <p:sp>
-        <p:nvSpPr>
-          <p:cNvPr id="5" name="Footer Placeholder 4">
-            <a:extLst>
-              <a:ext uri="{FF2B5EF4-FFF2-40B4-BE49-F238E27FC236}">
-                <a16:creationId xmlns:a16="http://schemas.microsoft.com/office/drawing/2014/main" id="{D6543DC4-7FC4-099D-D6B7-60A5696251F2}"/>
-              </a:ext>
-            </a:extLst>
-          </p:cNvPr>
-          <p:cNvSpPr>
-            <a:spLocks noGrp="1"/>
-          </p:cNvSpPr>
-          <p:nvPr>
-            <p:ph type="ftr" sz="quarter" idx="11"/>
-          </p:nvPr>
-        </p:nvSpPr>
-        <p:spPr/>
-        <p:txBody>
-          <a:bodyPr/>
-          <a:lstStyle/>
-          <a:p>
-            <a:r>
-              <a:rPr lang="en-US"/>
-              <a:t>ECED3403 Computer Architecture. Colin O'Flynn.</a:t>
-            </a:r>
-            <a:endParaRPr lang="en-CA"/>
-          </a:p>
-        </p:txBody>
-      </p:sp>
-      <p:sp>
-        <p:nvSpPr>
-          <p:cNvPr id="6" name="Slide Number Placeholder 5">
-            <a:extLst>
-              <a:ext uri="{FF2B5EF4-FFF2-40B4-BE49-F238E27FC236}">
-                <a16:creationId xmlns:a16="http://schemas.microsoft.com/office/drawing/2014/main" id="{64581C42-159D-FF43-D3F0-9FF118E6E0F1}"/>
-              </a:ext>
-            </a:extLst>
-          </p:cNvPr>
-          <p:cNvSpPr>
-            <a:spLocks noGrp="1"/>
-          </p:cNvSpPr>
-          <p:nvPr>
-            <p:ph type="sldNum" sz="quarter" idx="12"/>
-          </p:nvPr>
-        </p:nvSpPr>
-        <p:spPr/>
-        <p:txBody>
-          <a:bodyPr/>
-          <a:lstStyle/>
-          <a:p>
-            <a:fld id="{CF25CC40-D0F6-4666-ABAA-DE78F621EF61}" type="slidenum">
-              <a:rPr lang="en-CA" smtClean="0"/>
-              <a:t>38</a:t>
-            </a:fld>
-            <a:endParaRPr lang="en-CA"/>
-          </a:p>
-        </p:txBody>
-      </p:sp>
-    </p:spTree>
-    <p:extLst>
-      <p:ext uri="{BB962C8B-B14F-4D97-AF65-F5344CB8AC3E}">
-        <p14:creationId xmlns:p14="http://schemas.microsoft.com/office/powerpoint/2010/main" val="2005197702"/>
-      </p:ext>
-    </p:extLst>
-  </p:cSld>
-  <p:clrMapOvr>
-    <a:masterClrMapping/>
-  </p:clrMapOvr>
-</p:sld>
-</file>
-
-<file path=ppt/slides/slide39.xml><?xml version="1.0" encoding="utf-8"?>
-<p:sld xmlns:a="http://schemas.openxmlformats.org/drawingml/2006/main" xmlns:r="http://schemas.openxmlformats.org/officeDocument/2006/relationships" xmlns:p="http://schemas.openxmlformats.org/presentationml/2006/main">
-  <p:cSld>
-    <p:spTree>
-      <p:nvGrpSpPr>
-        <p:cNvPr id="1" name="">
-          <a:extLst>
-            <a:ext uri="{FF2B5EF4-FFF2-40B4-BE49-F238E27FC236}">
-              <a16:creationId xmlns:a16="http://schemas.microsoft.com/office/drawing/2014/main" id="{362EC9DB-39D2-3015-8093-A119DE08AFC3}"/>
-            </a:ext>
-          </a:extLst>
-        </p:cNvPr>
-        <p:cNvGrpSpPr/>
-        <p:nvPr/>
-      </p:nvGrpSpPr>
-      <p:grpSpPr>
-        <a:xfrm>
-          <a:off x="0" y="0"/>
-          <a:ext cx="0" cy="0"/>
-          <a:chOff x="0" y="0"/>
-          <a:chExt cx="0" cy="0"/>
-        </a:xfrm>
-      </p:grpSpPr>
-      <p:sp>
-        <p:nvSpPr>
-          <p:cNvPr id="2" name="Title 1">
-            <a:extLst>
-              <a:ext uri="{FF2B5EF4-FFF2-40B4-BE49-F238E27FC236}">
-                <a16:creationId xmlns:a16="http://schemas.microsoft.com/office/drawing/2014/main" id="{6F32D114-445A-07F7-0397-C900CFA6F254}"/>
-              </a:ext>
-            </a:extLst>
-          </p:cNvPr>
-          <p:cNvSpPr>
-            <a:spLocks noGrp="1"/>
-          </p:cNvSpPr>
-          <p:nvPr>
-            <p:ph type="title"/>
-          </p:nvPr>
-        </p:nvSpPr>
-        <p:spPr/>
-        <p:txBody>
-          <a:bodyPr/>
-          <a:lstStyle/>
-          <a:p>
-            <a:r>
-              <a:rPr lang="en-CA" dirty="0"/>
-              <a:t>Asynchronous Bus</a:t>
-            </a:r>
-          </a:p>
-        </p:txBody>
-      </p:sp>
-      <p:sp>
-        <p:nvSpPr>
-          <p:cNvPr id="3" name="Content Placeholder 2">
-            <a:extLst>
-              <a:ext uri="{FF2B5EF4-FFF2-40B4-BE49-F238E27FC236}">
-                <a16:creationId xmlns:a16="http://schemas.microsoft.com/office/drawing/2014/main" id="{CC7828FC-630B-1C71-DD54-F88C4ABFAF44}"/>
-              </a:ext>
-            </a:extLst>
-          </p:cNvPr>
-          <p:cNvSpPr>
-            <a:spLocks noGrp="1"/>
-          </p:cNvSpPr>
-          <p:nvPr>
-            <p:ph idx="1"/>
-          </p:nvPr>
-        </p:nvSpPr>
-        <p:spPr/>
-        <p:txBody>
-          <a:bodyPr/>
-          <a:lstStyle/>
-          <a:p>
-            <a:r>
-              <a:rPr lang="en-CA" dirty="0"/>
-              <a:t> Control signals define when data is ready or available</a:t>
-            </a:r>
-          </a:p>
-          <a:p>
-            <a:r>
-              <a:rPr lang="en-CA" dirty="0"/>
-              <a:t>Less strict timing requirements</a:t>
-            </a:r>
-          </a:p>
-        </p:txBody>
-      </p:sp>
-      <p:sp>
-        <p:nvSpPr>
-          <p:cNvPr id="4" name="Date Placeholder 3">
-            <a:extLst>
-              <a:ext uri="{FF2B5EF4-FFF2-40B4-BE49-F238E27FC236}">
-                <a16:creationId xmlns:a16="http://schemas.microsoft.com/office/drawing/2014/main" id="{9AA86F65-883E-4FA3-D8FB-E9C8ECC4B8F5}"/>
-              </a:ext>
-            </a:extLst>
-          </p:cNvPr>
-          <p:cNvSpPr>
-            <a:spLocks noGrp="1"/>
-          </p:cNvSpPr>
-          <p:nvPr>
-            <p:ph type="dt" sz="half" idx="10"/>
-          </p:nvPr>
-        </p:nvSpPr>
-        <p:spPr/>
-        <p:txBody>
-          <a:bodyPr/>
-          <a:lstStyle/>
-          <a:p>
-            <a:fld id="{CDC1A3F7-612D-48D0-A380-86227BC8600F}" type="datetime1">
-              <a:rPr lang="en-CA" smtClean="0"/>
-              <a:t>2026-03-02</a:t>
-            </a:fld>
-            <a:endParaRPr lang="en-CA"/>
-          </a:p>
-        </p:txBody>
-      </p:sp>
-      <p:sp>
-        <p:nvSpPr>
-          <p:cNvPr id="5" name="Footer Placeholder 4">
-            <a:extLst>
-              <a:ext uri="{FF2B5EF4-FFF2-40B4-BE49-F238E27FC236}">
-                <a16:creationId xmlns:a16="http://schemas.microsoft.com/office/drawing/2014/main" id="{AE2C3B0C-6B83-1E76-003F-8E943BBA8741}"/>
-              </a:ext>
-            </a:extLst>
-          </p:cNvPr>
-          <p:cNvSpPr>
-            <a:spLocks noGrp="1"/>
-          </p:cNvSpPr>
-          <p:nvPr>
-            <p:ph type="ftr" sz="quarter" idx="11"/>
-          </p:nvPr>
-        </p:nvSpPr>
-        <p:spPr/>
-        <p:txBody>
-          <a:bodyPr/>
-          <a:lstStyle/>
-          <a:p>
-            <a:r>
-              <a:rPr lang="en-US"/>
-              <a:t>ECED3403 Computer Architecture. Colin O'Flynn.</a:t>
-            </a:r>
-            <a:endParaRPr lang="en-CA"/>
-          </a:p>
-        </p:txBody>
-      </p:sp>
-      <p:sp>
-        <p:nvSpPr>
-          <p:cNvPr id="6" name="Slide Number Placeholder 5">
-            <a:extLst>
-              <a:ext uri="{FF2B5EF4-FFF2-40B4-BE49-F238E27FC236}">
-                <a16:creationId xmlns:a16="http://schemas.microsoft.com/office/drawing/2014/main" id="{4EEB8B29-E238-0EF5-A270-A881E05B0B80}"/>
-              </a:ext>
-            </a:extLst>
-          </p:cNvPr>
-          <p:cNvSpPr>
-            <a:spLocks noGrp="1"/>
-          </p:cNvSpPr>
-          <p:nvPr>
-            <p:ph type="sldNum" sz="quarter" idx="12"/>
-          </p:nvPr>
-        </p:nvSpPr>
-        <p:spPr/>
-        <p:txBody>
-          <a:bodyPr/>
-          <a:lstStyle/>
-          <a:p>
-            <a:fld id="{CF25CC40-D0F6-4666-ABAA-DE78F621EF61}" type="slidenum">
-              <a:rPr lang="en-CA" smtClean="0"/>
-              <a:t>39</a:t>
-            </a:fld>
-            <a:endParaRPr lang="en-CA"/>
-          </a:p>
-        </p:txBody>
-      </p:sp>
-    </p:spTree>
-    <p:extLst>
-      <p:ext uri="{BB962C8B-B14F-4D97-AF65-F5344CB8AC3E}">
-        <p14:creationId xmlns:p14="http://schemas.microsoft.com/office/powerpoint/2010/main" val="1049135432"/>
-      </p:ext>
-    </p:extLst>
-  </p:cSld>
-  <p:clrMapOvr>
-    <a:masterClrMapping/>
-  </p:clrMapOvr>
-</p:sld>
-</file>
-
 <file path=ppt/slides/slide4.xml><?xml version="1.0" encoding="utf-8"?>
 <p:sld xmlns:a="http://schemas.openxmlformats.org/drawingml/2006/main" xmlns:r="http://schemas.openxmlformats.org/officeDocument/2006/relationships" xmlns:p="http://schemas.openxmlformats.org/presentationml/2006/main">
   <p:cSld>
@@ -43203,7 +43393,7 @@
           <a:p>
             <a:fld id="{CDC1A3F7-612D-48D0-A380-86227BC8600F}" type="datetime1">
               <a:rPr lang="en-CA" smtClean="0"/>
-              <a:t>2026-03-01</a:t>
+              <a:t>2026-03-02</a:t>
             </a:fld>
             <a:endParaRPr lang="en-CA"/>
           </a:p>
@@ -43332,7 +43522,7 @@
           <p:cNvPr id="2" name="Title 1">
             <a:extLst>
               <a:ext uri="{FF2B5EF4-FFF2-40B4-BE49-F238E27FC236}">
-                <a16:creationId xmlns:a16="http://schemas.microsoft.com/office/drawing/2014/main" id="{F4A4791B-58F8-2124-6898-702B9328F92C}"/>
+                <a16:creationId xmlns:a16="http://schemas.microsoft.com/office/drawing/2014/main" id="{B2B8F2EC-C2FB-44F6-2BD8-F3830B4119CA}"/>
               </a:ext>
             </a:extLst>
           </p:cNvPr>
@@ -43350,7 +43540,48 @@
           <a:p>
             <a:r>
               <a:rPr lang="en-CA" dirty="0"/>
-              <a:t>Async Read Example</a:t>
+              <a:t>Simple External Busses: SRAM</a:t>
+            </a:r>
+          </a:p>
+        </p:txBody>
+      </p:sp>
+      <p:sp>
+        <p:nvSpPr>
+          <p:cNvPr id="3" name="Content Placeholder 2">
+            <a:extLst>
+              <a:ext uri="{FF2B5EF4-FFF2-40B4-BE49-F238E27FC236}">
+                <a16:creationId xmlns:a16="http://schemas.microsoft.com/office/drawing/2014/main" id="{B987AC14-31BB-3CB8-7BDE-9F467D5438E9}"/>
+              </a:ext>
+            </a:extLst>
+          </p:cNvPr>
+          <p:cNvSpPr>
+            <a:spLocks noGrp="1"/>
+          </p:cNvSpPr>
+          <p:nvPr>
+            <p:ph idx="1"/>
+          </p:nvPr>
+        </p:nvSpPr>
+        <p:spPr>
+          <a:xfrm>
+            <a:off x="664336" y="5825621"/>
+            <a:ext cx="10515600" cy="594497"/>
+          </a:xfrm>
+        </p:spPr>
+        <p:txBody>
+          <a:bodyPr>
+            <a:normAutofit/>
+          </a:bodyPr>
+          <a:lstStyle/>
+          <a:p>
+            <a:r>
+              <a:rPr lang="en-CA" sz="1800" dirty="0">
+                <a:hlinkClick r:id="rId2"/>
+              </a:rPr>
+              <a:t>https://ww1.microchip.com/downloads/en/DeviceDoc/Atmel-6430-32-bit-Cortex-M3-Microcontroller-SAM3U4-SAM3U2-SAM3U1_Datasheet.pdf</a:t>
+            </a:r>
+            <a:r>
+              <a:rPr lang="en-CA" sz="1800" dirty="0"/>
+              <a:t> </a:t>
             </a:r>
           </a:p>
         </p:txBody>
@@ -43360,7 +43591,7 @@
           <p:cNvPr id="4" name="Date Placeholder 3">
             <a:extLst>
               <a:ext uri="{FF2B5EF4-FFF2-40B4-BE49-F238E27FC236}">
-                <a16:creationId xmlns:a16="http://schemas.microsoft.com/office/drawing/2014/main" id="{53081A54-DB71-FE74-8E6C-AB8DE8F12A12}"/>
+                <a16:creationId xmlns:a16="http://schemas.microsoft.com/office/drawing/2014/main" id="{D9099A27-7D53-407F-3C80-B3B91157CA68}"/>
               </a:ext>
             </a:extLst>
           </p:cNvPr>
@@ -43380,7 +43611,7 @@
               <a:rPr lang="en-CA" smtClean="0"/>
               <a:t>2026-03-02</a:t>
             </a:fld>
-            <a:endParaRPr lang="en-CA" dirty="0"/>
+            <a:endParaRPr lang="en-CA"/>
           </a:p>
         </p:txBody>
       </p:sp>
@@ -43389,7 +43620,7 @@
           <p:cNvPr id="5" name="Footer Placeholder 4">
             <a:extLst>
               <a:ext uri="{FF2B5EF4-FFF2-40B4-BE49-F238E27FC236}">
-                <a16:creationId xmlns:a16="http://schemas.microsoft.com/office/drawing/2014/main" id="{126765EF-4A2F-EF95-5253-D57782164F9D}"/>
+                <a16:creationId xmlns:a16="http://schemas.microsoft.com/office/drawing/2014/main" id="{98BBCC7F-7E67-F152-34CD-AAB14FD68CFE}"/>
               </a:ext>
             </a:extLst>
           </p:cNvPr>
@@ -43418,7 +43649,7 @@
           <p:cNvPr id="6" name="Slide Number Placeholder 5">
             <a:extLst>
               <a:ext uri="{FF2B5EF4-FFF2-40B4-BE49-F238E27FC236}">
-                <a16:creationId xmlns:a16="http://schemas.microsoft.com/office/drawing/2014/main" id="{ABC99EAC-D052-0BCB-4322-99EA25BAA4FE}"/>
+                <a16:creationId xmlns:a16="http://schemas.microsoft.com/office/drawing/2014/main" id="{0EBE7669-2320-723F-C3DD-CB023D30D58C}"/>
               </a:ext>
             </a:extLst>
           </p:cNvPr>
@@ -43437,6 +43668,628 @@
             <a:fld id="{CF25CC40-D0F6-4666-ABAA-DE78F621EF61}" type="slidenum">
               <a:rPr lang="en-CA" smtClean="0"/>
               <a:t>40</a:t>
+            </a:fld>
+            <a:endParaRPr lang="en-CA"/>
+          </a:p>
+        </p:txBody>
+      </p:sp>
+      <p:pic>
+        <p:nvPicPr>
+          <p:cNvPr id="8" name="Picture 7" descr="A diagram of a computer&#10;&#10;AI-generated content may be incorrect.">
+            <a:extLst>
+              <a:ext uri="{FF2B5EF4-FFF2-40B4-BE49-F238E27FC236}">
+                <a16:creationId xmlns:a16="http://schemas.microsoft.com/office/drawing/2014/main" id="{BE6E356A-1BD0-2DF8-3B78-B884CB28C2B0}"/>
+              </a:ext>
+            </a:extLst>
+          </p:cNvPr>
+          <p:cNvPicPr>
+            <a:picLocks noChangeAspect="1"/>
+          </p:cNvPicPr>
+          <p:nvPr/>
+        </p:nvPicPr>
+        <p:blipFill>
+          <a:blip r:embed="rId3"/>
+          <a:stretch>
+            <a:fillRect/>
+          </a:stretch>
+        </p:blipFill>
+        <p:spPr>
+          <a:xfrm>
+            <a:off x="1706451" y="1563321"/>
+            <a:ext cx="7572777" cy="4250675"/>
+          </a:xfrm>
+          <a:prstGeom prst="rect">
+            <a:avLst/>
+          </a:prstGeom>
+        </p:spPr>
+      </p:pic>
+    </p:spTree>
+    <p:extLst>
+      <p:ext uri="{BB962C8B-B14F-4D97-AF65-F5344CB8AC3E}">
+        <p14:creationId xmlns:p14="http://schemas.microsoft.com/office/powerpoint/2010/main" val="2006870802"/>
+      </p:ext>
+    </p:extLst>
+  </p:cSld>
+  <p:clrMapOvr>
+    <a:masterClrMapping/>
+  </p:clrMapOvr>
+</p:sld>
+</file>
+
+<file path=ppt/slides/slide41.xml><?xml version="1.0" encoding="utf-8"?>
+<p:sld xmlns:a="http://schemas.openxmlformats.org/drawingml/2006/main" xmlns:r="http://schemas.openxmlformats.org/officeDocument/2006/relationships" xmlns:p="http://schemas.openxmlformats.org/presentationml/2006/main">
+  <p:cSld>
+    <p:spTree>
+      <p:nvGrpSpPr>
+        <p:cNvPr id="1" name=""/>
+        <p:cNvGrpSpPr/>
+        <p:nvPr/>
+      </p:nvGrpSpPr>
+      <p:grpSpPr>
+        <a:xfrm>
+          <a:off x="0" y="0"/>
+          <a:ext cx="0" cy="0"/>
+          <a:chOff x="0" y="0"/>
+          <a:chExt cx="0" cy="0"/>
+        </a:xfrm>
+      </p:grpSpPr>
+      <p:sp>
+        <p:nvSpPr>
+          <p:cNvPr id="2" name="Title 1">
+            <a:extLst>
+              <a:ext uri="{FF2B5EF4-FFF2-40B4-BE49-F238E27FC236}">
+                <a16:creationId xmlns:a16="http://schemas.microsoft.com/office/drawing/2014/main" id="{17AA9C32-9ECE-96B3-8394-D3A6F4C80C4A}"/>
+              </a:ext>
+            </a:extLst>
+          </p:cNvPr>
+          <p:cNvSpPr>
+            <a:spLocks noGrp="1"/>
+          </p:cNvSpPr>
+          <p:nvPr>
+            <p:ph type="title"/>
+          </p:nvPr>
+        </p:nvSpPr>
+        <p:spPr/>
+        <p:txBody>
+          <a:bodyPr/>
+          <a:lstStyle/>
+          <a:p>
+            <a:r>
+              <a:rPr lang="en-CA" dirty="0"/>
+              <a:t>Synchronous Bus</a:t>
+            </a:r>
+          </a:p>
+        </p:txBody>
+      </p:sp>
+      <p:sp>
+        <p:nvSpPr>
+          <p:cNvPr id="3" name="Content Placeholder 2">
+            <a:extLst>
+              <a:ext uri="{FF2B5EF4-FFF2-40B4-BE49-F238E27FC236}">
+                <a16:creationId xmlns:a16="http://schemas.microsoft.com/office/drawing/2014/main" id="{06DDF808-E22A-222A-A67B-FF6753AEC2D3}"/>
+              </a:ext>
+            </a:extLst>
+          </p:cNvPr>
+          <p:cNvSpPr>
+            <a:spLocks noGrp="1"/>
+          </p:cNvSpPr>
+          <p:nvPr>
+            <p:ph idx="1"/>
+          </p:nvPr>
+        </p:nvSpPr>
+        <p:spPr/>
+        <p:txBody>
+          <a:bodyPr/>
+          <a:lstStyle/>
+          <a:p>
+            <a:r>
+              <a:rPr lang="en-CA" dirty="0"/>
+              <a:t>Synchronous buses will have a </a:t>
+            </a:r>
+            <a:r>
+              <a:rPr lang="en-CA" u="sng" dirty="0"/>
+              <a:t>clock</a:t>
+            </a:r>
+          </a:p>
+          <a:p>
+            <a:r>
+              <a:rPr lang="en-CA" dirty="0"/>
+              <a:t>All data &amp; control signals only read on the </a:t>
+            </a:r>
+            <a:r>
+              <a:rPr lang="en-CA" u="sng" dirty="0"/>
+              <a:t>clock edge</a:t>
+            </a:r>
+            <a:endParaRPr lang="en-CA" dirty="0"/>
+          </a:p>
+          <a:p>
+            <a:r>
+              <a:rPr lang="en-CA" dirty="0"/>
+              <a:t>Normally strict timing requirements</a:t>
+            </a:r>
+          </a:p>
+          <a:p>
+            <a:endParaRPr lang="en-CA" dirty="0"/>
+          </a:p>
+          <a:p>
+            <a:r>
+              <a:rPr lang="en-CA" dirty="0"/>
+              <a:t>Many internal busses are synchronous (e.g., AHB)</a:t>
+            </a:r>
+          </a:p>
+          <a:p>
+            <a:r>
+              <a:rPr lang="en-CA" dirty="0"/>
+              <a:t>DDR Memory is an external example of synchronous bus</a:t>
+            </a:r>
+          </a:p>
+        </p:txBody>
+      </p:sp>
+      <p:sp>
+        <p:nvSpPr>
+          <p:cNvPr id="4" name="Date Placeholder 3">
+            <a:extLst>
+              <a:ext uri="{FF2B5EF4-FFF2-40B4-BE49-F238E27FC236}">
+                <a16:creationId xmlns:a16="http://schemas.microsoft.com/office/drawing/2014/main" id="{C9ED80E8-EC08-190E-8089-52F8FD9B93EC}"/>
+              </a:ext>
+            </a:extLst>
+          </p:cNvPr>
+          <p:cNvSpPr>
+            <a:spLocks noGrp="1"/>
+          </p:cNvSpPr>
+          <p:nvPr>
+            <p:ph type="dt" sz="half" idx="10"/>
+          </p:nvPr>
+        </p:nvSpPr>
+        <p:spPr/>
+        <p:txBody>
+          <a:bodyPr/>
+          <a:lstStyle/>
+          <a:p>
+            <a:fld id="{CDC1A3F7-612D-48D0-A380-86227BC8600F}" type="datetime1">
+              <a:rPr lang="en-CA" smtClean="0"/>
+              <a:t>2026-03-02</a:t>
+            </a:fld>
+            <a:endParaRPr lang="en-CA"/>
+          </a:p>
+        </p:txBody>
+      </p:sp>
+      <p:sp>
+        <p:nvSpPr>
+          <p:cNvPr id="5" name="Footer Placeholder 4">
+            <a:extLst>
+              <a:ext uri="{FF2B5EF4-FFF2-40B4-BE49-F238E27FC236}">
+                <a16:creationId xmlns:a16="http://schemas.microsoft.com/office/drawing/2014/main" id="{D6543DC4-7FC4-099D-D6B7-60A5696251F2}"/>
+              </a:ext>
+            </a:extLst>
+          </p:cNvPr>
+          <p:cNvSpPr>
+            <a:spLocks noGrp="1"/>
+          </p:cNvSpPr>
+          <p:nvPr>
+            <p:ph type="ftr" sz="quarter" idx="11"/>
+          </p:nvPr>
+        </p:nvSpPr>
+        <p:spPr/>
+        <p:txBody>
+          <a:bodyPr/>
+          <a:lstStyle/>
+          <a:p>
+            <a:r>
+              <a:rPr lang="en-US"/>
+              <a:t>ECED3403 Computer Architecture. Colin O'Flynn.</a:t>
+            </a:r>
+            <a:endParaRPr lang="en-CA"/>
+          </a:p>
+        </p:txBody>
+      </p:sp>
+      <p:sp>
+        <p:nvSpPr>
+          <p:cNvPr id="6" name="Slide Number Placeholder 5">
+            <a:extLst>
+              <a:ext uri="{FF2B5EF4-FFF2-40B4-BE49-F238E27FC236}">
+                <a16:creationId xmlns:a16="http://schemas.microsoft.com/office/drawing/2014/main" id="{64581C42-159D-FF43-D3F0-9FF118E6E0F1}"/>
+              </a:ext>
+            </a:extLst>
+          </p:cNvPr>
+          <p:cNvSpPr>
+            <a:spLocks noGrp="1"/>
+          </p:cNvSpPr>
+          <p:nvPr>
+            <p:ph type="sldNum" sz="quarter" idx="12"/>
+          </p:nvPr>
+        </p:nvSpPr>
+        <p:spPr/>
+        <p:txBody>
+          <a:bodyPr/>
+          <a:lstStyle/>
+          <a:p>
+            <a:fld id="{CF25CC40-D0F6-4666-ABAA-DE78F621EF61}" type="slidenum">
+              <a:rPr lang="en-CA" smtClean="0"/>
+              <a:t>41</a:t>
+            </a:fld>
+            <a:endParaRPr lang="en-CA"/>
+          </a:p>
+        </p:txBody>
+      </p:sp>
+    </p:spTree>
+    <p:extLst>
+      <p:ext uri="{BB962C8B-B14F-4D97-AF65-F5344CB8AC3E}">
+        <p14:creationId xmlns:p14="http://schemas.microsoft.com/office/powerpoint/2010/main" val="2005197702"/>
+      </p:ext>
+    </p:extLst>
+  </p:cSld>
+  <p:clrMapOvr>
+    <a:masterClrMapping/>
+  </p:clrMapOvr>
+</p:sld>
+</file>
+
+<file path=ppt/slides/slide42.xml><?xml version="1.0" encoding="utf-8"?>
+<p:sld xmlns:a="http://schemas.openxmlformats.org/drawingml/2006/main" xmlns:r="http://schemas.openxmlformats.org/officeDocument/2006/relationships" xmlns:p="http://schemas.openxmlformats.org/presentationml/2006/main">
+  <p:cSld>
+    <p:spTree>
+      <p:nvGrpSpPr>
+        <p:cNvPr id="1" name="">
+          <a:extLst>
+            <a:ext uri="{FF2B5EF4-FFF2-40B4-BE49-F238E27FC236}">
+              <a16:creationId xmlns:a16="http://schemas.microsoft.com/office/drawing/2014/main" id="{362EC9DB-39D2-3015-8093-A119DE08AFC3}"/>
+            </a:ext>
+          </a:extLst>
+        </p:cNvPr>
+        <p:cNvGrpSpPr/>
+        <p:nvPr/>
+      </p:nvGrpSpPr>
+      <p:grpSpPr>
+        <a:xfrm>
+          <a:off x="0" y="0"/>
+          <a:ext cx="0" cy="0"/>
+          <a:chOff x="0" y="0"/>
+          <a:chExt cx="0" cy="0"/>
+        </a:xfrm>
+      </p:grpSpPr>
+      <p:sp>
+        <p:nvSpPr>
+          <p:cNvPr id="2" name="Title 1">
+            <a:extLst>
+              <a:ext uri="{FF2B5EF4-FFF2-40B4-BE49-F238E27FC236}">
+                <a16:creationId xmlns:a16="http://schemas.microsoft.com/office/drawing/2014/main" id="{6F32D114-445A-07F7-0397-C900CFA6F254}"/>
+              </a:ext>
+            </a:extLst>
+          </p:cNvPr>
+          <p:cNvSpPr>
+            <a:spLocks noGrp="1"/>
+          </p:cNvSpPr>
+          <p:nvPr>
+            <p:ph type="title"/>
+          </p:nvPr>
+        </p:nvSpPr>
+        <p:spPr/>
+        <p:txBody>
+          <a:bodyPr/>
+          <a:lstStyle/>
+          <a:p>
+            <a:r>
+              <a:rPr lang="en-CA" dirty="0"/>
+              <a:t>Asynchronous Bus</a:t>
+            </a:r>
+          </a:p>
+        </p:txBody>
+      </p:sp>
+      <p:sp>
+        <p:nvSpPr>
+          <p:cNvPr id="3" name="Content Placeholder 2">
+            <a:extLst>
+              <a:ext uri="{FF2B5EF4-FFF2-40B4-BE49-F238E27FC236}">
+                <a16:creationId xmlns:a16="http://schemas.microsoft.com/office/drawing/2014/main" id="{CC7828FC-630B-1C71-DD54-F88C4ABFAF44}"/>
+              </a:ext>
+            </a:extLst>
+          </p:cNvPr>
+          <p:cNvSpPr>
+            <a:spLocks noGrp="1"/>
+          </p:cNvSpPr>
+          <p:nvPr>
+            <p:ph idx="1"/>
+          </p:nvPr>
+        </p:nvSpPr>
+        <p:spPr/>
+        <p:txBody>
+          <a:bodyPr/>
+          <a:lstStyle/>
+          <a:p>
+            <a:r>
+              <a:rPr lang="en-CA" dirty="0"/>
+              <a:t>Control signals define when data is ready or available</a:t>
+            </a:r>
+          </a:p>
+          <a:p>
+            <a:r>
+              <a:rPr lang="en-CA" dirty="0"/>
+              <a:t>Less strict timing requirements</a:t>
+            </a:r>
+          </a:p>
+          <a:p>
+            <a:r>
+              <a:rPr lang="en-CA" dirty="0"/>
+              <a:t>“Normal” (older) SRAM chips, many “slower” external memories are asynchronous</a:t>
+            </a:r>
+          </a:p>
+        </p:txBody>
+      </p:sp>
+      <p:sp>
+        <p:nvSpPr>
+          <p:cNvPr id="4" name="Date Placeholder 3">
+            <a:extLst>
+              <a:ext uri="{FF2B5EF4-FFF2-40B4-BE49-F238E27FC236}">
+                <a16:creationId xmlns:a16="http://schemas.microsoft.com/office/drawing/2014/main" id="{9AA86F65-883E-4FA3-D8FB-E9C8ECC4B8F5}"/>
+              </a:ext>
+            </a:extLst>
+          </p:cNvPr>
+          <p:cNvSpPr>
+            <a:spLocks noGrp="1"/>
+          </p:cNvSpPr>
+          <p:nvPr>
+            <p:ph type="dt" sz="half" idx="10"/>
+          </p:nvPr>
+        </p:nvSpPr>
+        <p:spPr/>
+        <p:txBody>
+          <a:bodyPr/>
+          <a:lstStyle/>
+          <a:p>
+            <a:fld id="{CDC1A3F7-612D-48D0-A380-86227BC8600F}" type="datetime1">
+              <a:rPr lang="en-CA" smtClean="0"/>
+              <a:t>2026-03-02</a:t>
+            </a:fld>
+            <a:endParaRPr lang="en-CA"/>
+          </a:p>
+        </p:txBody>
+      </p:sp>
+      <p:sp>
+        <p:nvSpPr>
+          <p:cNvPr id="5" name="Footer Placeholder 4">
+            <a:extLst>
+              <a:ext uri="{FF2B5EF4-FFF2-40B4-BE49-F238E27FC236}">
+                <a16:creationId xmlns:a16="http://schemas.microsoft.com/office/drawing/2014/main" id="{AE2C3B0C-6B83-1E76-003F-8E943BBA8741}"/>
+              </a:ext>
+            </a:extLst>
+          </p:cNvPr>
+          <p:cNvSpPr>
+            <a:spLocks noGrp="1"/>
+          </p:cNvSpPr>
+          <p:nvPr>
+            <p:ph type="ftr" sz="quarter" idx="11"/>
+          </p:nvPr>
+        </p:nvSpPr>
+        <p:spPr/>
+        <p:txBody>
+          <a:bodyPr/>
+          <a:lstStyle/>
+          <a:p>
+            <a:r>
+              <a:rPr lang="en-US"/>
+              <a:t>ECED3403 Computer Architecture. Colin O'Flynn.</a:t>
+            </a:r>
+            <a:endParaRPr lang="en-CA"/>
+          </a:p>
+        </p:txBody>
+      </p:sp>
+      <p:sp>
+        <p:nvSpPr>
+          <p:cNvPr id="6" name="Slide Number Placeholder 5">
+            <a:extLst>
+              <a:ext uri="{FF2B5EF4-FFF2-40B4-BE49-F238E27FC236}">
+                <a16:creationId xmlns:a16="http://schemas.microsoft.com/office/drawing/2014/main" id="{4EEB8B29-E238-0EF5-A270-A881E05B0B80}"/>
+              </a:ext>
+            </a:extLst>
+          </p:cNvPr>
+          <p:cNvSpPr>
+            <a:spLocks noGrp="1"/>
+          </p:cNvSpPr>
+          <p:nvPr>
+            <p:ph type="sldNum" sz="quarter" idx="12"/>
+          </p:nvPr>
+        </p:nvSpPr>
+        <p:spPr/>
+        <p:txBody>
+          <a:bodyPr/>
+          <a:lstStyle/>
+          <a:p>
+            <a:fld id="{CF25CC40-D0F6-4666-ABAA-DE78F621EF61}" type="slidenum">
+              <a:rPr lang="en-CA" smtClean="0"/>
+              <a:t>42</a:t>
+            </a:fld>
+            <a:endParaRPr lang="en-CA"/>
+          </a:p>
+        </p:txBody>
+      </p:sp>
+      <p:pic>
+        <p:nvPicPr>
+          <p:cNvPr id="1026" name="Picture 2" descr="Static random-access memory - Wikipedia">
+            <a:extLst>
+              <a:ext uri="{FF2B5EF4-FFF2-40B4-BE49-F238E27FC236}">
+                <a16:creationId xmlns:a16="http://schemas.microsoft.com/office/drawing/2014/main" id="{90248727-739A-F21A-66BB-D896A6A6A024}"/>
+              </a:ext>
+            </a:extLst>
+          </p:cNvPr>
+          <p:cNvPicPr>
+            <a:picLocks noChangeAspect="1" noChangeArrowheads="1"/>
+          </p:cNvPicPr>
+          <p:nvPr/>
+        </p:nvPicPr>
+        <p:blipFill>
+          <a:blip r:embed="rId2">
+            <a:extLst>
+              <a:ext uri="{28A0092B-C50C-407E-A947-70E740481C1C}">
+                <a14:useLocalDpi xmlns:a14="http://schemas.microsoft.com/office/drawing/2010/main" val="0"/>
+              </a:ext>
+            </a:extLst>
+          </a:blip>
+          <a:srcRect/>
+          <a:stretch>
+            <a:fillRect/>
+          </a:stretch>
+        </p:blipFill>
+        <p:spPr bwMode="auto">
+          <a:xfrm>
+            <a:off x="4038600" y="4000842"/>
+            <a:ext cx="3840913" cy="2311058"/>
+          </a:xfrm>
+          <a:prstGeom prst="rect">
+            <a:avLst/>
+          </a:prstGeom>
+          <a:noFill/>
+          <a:extLst>
+            <a:ext uri="{909E8E84-426E-40DD-AFC4-6F175D3DCCD1}">
+              <a14:hiddenFill xmlns:a14="http://schemas.microsoft.com/office/drawing/2010/main">
+                <a:solidFill>
+                  <a:srgbClr val="FFFFFF"/>
+                </a:solidFill>
+              </a14:hiddenFill>
+            </a:ext>
+          </a:extLst>
+        </p:spPr>
+      </p:pic>
+    </p:spTree>
+    <p:extLst>
+      <p:ext uri="{BB962C8B-B14F-4D97-AF65-F5344CB8AC3E}">
+        <p14:creationId xmlns:p14="http://schemas.microsoft.com/office/powerpoint/2010/main" val="1049135432"/>
+      </p:ext>
+    </p:extLst>
+  </p:cSld>
+  <p:clrMapOvr>
+    <a:masterClrMapping/>
+  </p:clrMapOvr>
+</p:sld>
+</file>
+
+<file path=ppt/slides/slide43.xml><?xml version="1.0" encoding="utf-8"?>
+<p:sld xmlns:a="http://schemas.openxmlformats.org/drawingml/2006/main" xmlns:r="http://schemas.openxmlformats.org/officeDocument/2006/relationships" xmlns:p="http://schemas.openxmlformats.org/presentationml/2006/main">
+  <p:cSld>
+    <p:spTree>
+      <p:nvGrpSpPr>
+        <p:cNvPr id="1" name=""/>
+        <p:cNvGrpSpPr/>
+        <p:nvPr/>
+      </p:nvGrpSpPr>
+      <p:grpSpPr>
+        <a:xfrm>
+          <a:off x="0" y="0"/>
+          <a:ext cx="0" cy="0"/>
+          <a:chOff x="0" y="0"/>
+          <a:chExt cx="0" cy="0"/>
+        </a:xfrm>
+      </p:grpSpPr>
+      <p:sp>
+        <p:nvSpPr>
+          <p:cNvPr id="2" name="Title 1">
+            <a:extLst>
+              <a:ext uri="{FF2B5EF4-FFF2-40B4-BE49-F238E27FC236}">
+                <a16:creationId xmlns:a16="http://schemas.microsoft.com/office/drawing/2014/main" id="{F4A4791B-58F8-2124-6898-702B9328F92C}"/>
+              </a:ext>
+            </a:extLst>
+          </p:cNvPr>
+          <p:cNvSpPr>
+            <a:spLocks noGrp="1"/>
+          </p:cNvSpPr>
+          <p:nvPr>
+            <p:ph type="title"/>
+          </p:nvPr>
+        </p:nvSpPr>
+        <p:spPr/>
+        <p:txBody>
+          <a:bodyPr/>
+          <a:lstStyle/>
+          <a:p>
+            <a:r>
+              <a:rPr lang="en-CA" dirty="0"/>
+              <a:t>Async Read Example</a:t>
+            </a:r>
+          </a:p>
+        </p:txBody>
+      </p:sp>
+      <p:sp>
+        <p:nvSpPr>
+          <p:cNvPr id="4" name="Date Placeholder 3">
+            <a:extLst>
+              <a:ext uri="{FF2B5EF4-FFF2-40B4-BE49-F238E27FC236}">
+                <a16:creationId xmlns:a16="http://schemas.microsoft.com/office/drawing/2014/main" id="{53081A54-DB71-FE74-8E6C-AB8DE8F12A12}"/>
+              </a:ext>
+            </a:extLst>
+          </p:cNvPr>
+          <p:cNvSpPr>
+            <a:spLocks noGrp="1"/>
+          </p:cNvSpPr>
+          <p:nvPr>
+            <p:ph type="dt" sz="half" idx="10"/>
+          </p:nvPr>
+        </p:nvSpPr>
+        <p:spPr/>
+        <p:txBody>
+          <a:bodyPr/>
+          <a:lstStyle/>
+          <a:p>
+            <a:fld id="{CDC1A3F7-612D-48D0-A380-86227BC8600F}" type="datetime1">
+              <a:rPr lang="en-CA" smtClean="0"/>
+              <a:t>2026-03-02</a:t>
+            </a:fld>
+            <a:endParaRPr lang="en-CA" dirty="0"/>
+          </a:p>
+        </p:txBody>
+      </p:sp>
+      <p:sp>
+        <p:nvSpPr>
+          <p:cNvPr id="5" name="Footer Placeholder 4">
+            <a:extLst>
+              <a:ext uri="{FF2B5EF4-FFF2-40B4-BE49-F238E27FC236}">
+                <a16:creationId xmlns:a16="http://schemas.microsoft.com/office/drawing/2014/main" id="{126765EF-4A2F-EF95-5253-D57782164F9D}"/>
+              </a:ext>
+            </a:extLst>
+          </p:cNvPr>
+          <p:cNvSpPr>
+            <a:spLocks noGrp="1"/>
+          </p:cNvSpPr>
+          <p:nvPr>
+            <p:ph type="ftr" sz="quarter" idx="11"/>
+          </p:nvPr>
+        </p:nvSpPr>
+        <p:spPr/>
+        <p:txBody>
+          <a:bodyPr/>
+          <a:lstStyle/>
+          <a:p>
+            <a:r>
+              <a:rPr lang="en-US"/>
+              <a:t>ECED3403 Computer Architecture. Colin O'Flynn.</a:t>
+            </a:r>
+            <a:endParaRPr lang="en-CA"/>
+          </a:p>
+        </p:txBody>
+      </p:sp>
+      <p:sp>
+        <p:nvSpPr>
+          <p:cNvPr id="6" name="Slide Number Placeholder 5">
+            <a:extLst>
+              <a:ext uri="{FF2B5EF4-FFF2-40B4-BE49-F238E27FC236}">
+                <a16:creationId xmlns:a16="http://schemas.microsoft.com/office/drawing/2014/main" id="{ABC99EAC-D052-0BCB-4322-99EA25BAA4FE}"/>
+              </a:ext>
+            </a:extLst>
+          </p:cNvPr>
+          <p:cNvSpPr>
+            <a:spLocks noGrp="1"/>
+          </p:cNvSpPr>
+          <p:nvPr>
+            <p:ph type="sldNum" sz="quarter" idx="12"/>
+          </p:nvPr>
+        </p:nvSpPr>
+        <p:spPr/>
+        <p:txBody>
+          <a:bodyPr/>
+          <a:lstStyle/>
+          <a:p>
+            <a:fld id="{CF25CC40-D0F6-4666-ABAA-DE78F621EF61}" type="slidenum">
+              <a:rPr lang="en-CA" smtClean="0"/>
+              <a:t>43</a:t>
             </a:fld>
             <a:endParaRPr lang="en-CA"/>
           </a:p>
@@ -43644,7 +44497,7 @@
 </p:sld>
 </file>
 
-<file path=ppt/slides/slide41.xml><?xml version="1.0" encoding="utf-8"?>
+<file path=ppt/slides/slide44.xml><?xml version="1.0" encoding="utf-8"?>
 <p:sld xmlns:a="http://schemas.openxmlformats.org/drawingml/2006/main" xmlns:r="http://schemas.openxmlformats.org/officeDocument/2006/relationships" xmlns:p="http://schemas.openxmlformats.org/presentationml/2006/main">
   <p:cSld>
     <p:spTree>
@@ -43776,7 +44629,7 @@
           <a:p>
             <a:fld id="{CF25CC40-D0F6-4666-ABAA-DE78F621EF61}" type="slidenum">
               <a:rPr lang="en-CA" smtClean="0"/>
-              <a:t>41</a:t>
+              <a:t>44</a:t>
             </a:fld>
             <a:endParaRPr lang="en-CA"/>
           </a:p>
@@ -43982,7 +44835,184 @@
 </p:sld>
 </file>
 
-<file path=ppt/slides/slide42.xml><?xml version="1.0" encoding="utf-8"?>
+<file path=ppt/slides/slide45.xml><?xml version="1.0" encoding="utf-8"?>
+<p:sld xmlns:a="http://schemas.openxmlformats.org/drawingml/2006/main" xmlns:r="http://schemas.openxmlformats.org/officeDocument/2006/relationships" xmlns:p="http://schemas.openxmlformats.org/presentationml/2006/main">
+  <p:cSld>
+    <p:spTree>
+      <p:nvGrpSpPr>
+        <p:cNvPr id="1" name=""/>
+        <p:cNvGrpSpPr/>
+        <p:nvPr/>
+      </p:nvGrpSpPr>
+      <p:grpSpPr>
+        <a:xfrm>
+          <a:off x="0" y="0"/>
+          <a:ext cx="0" cy="0"/>
+          <a:chOff x="0" y="0"/>
+          <a:chExt cx="0" cy="0"/>
+        </a:xfrm>
+      </p:grpSpPr>
+      <p:sp>
+        <p:nvSpPr>
+          <p:cNvPr id="2" name="Title 1">
+            <a:extLst>
+              <a:ext uri="{FF2B5EF4-FFF2-40B4-BE49-F238E27FC236}">
+                <a16:creationId xmlns:a16="http://schemas.microsoft.com/office/drawing/2014/main" id="{101B884E-0D03-7209-D912-77A136887F33}"/>
+              </a:ext>
+            </a:extLst>
+          </p:cNvPr>
+          <p:cNvSpPr>
+            <a:spLocks noGrp="1"/>
+          </p:cNvSpPr>
+          <p:nvPr>
+            <p:ph type="title"/>
+          </p:nvPr>
+        </p:nvSpPr>
+        <p:spPr/>
+        <p:txBody>
+          <a:bodyPr/>
+          <a:lstStyle/>
+          <a:p>
+            <a:r>
+              <a:rPr lang="en-CA" dirty="0"/>
+              <a:t>SRAM Configuration</a:t>
+            </a:r>
+          </a:p>
+        </p:txBody>
+      </p:sp>
+      <p:pic>
+        <p:nvPicPr>
+          <p:cNvPr id="8" name="Content Placeholder 7">
+            <a:extLst>
+              <a:ext uri="{FF2B5EF4-FFF2-40B4-BE49-F238E27FC236}">
+                <a16:creationId xmlns:a16="http://schemas.microsoft.com/office/drawing/2014/main" id="{819C51E2-5987-491D-0DF3-38064815F4E6}"/>
+              </a:ext>
+            </a:extLst>
+          </p:cNvPr>
+          <p:cNvPicPr>
+            <a:picLocks noGrp="1" noChangeAspect="1"/>
+          </p:cNvPicPr>
+          <p:nvPr>
+            <p:ph idx="1"/>
+          </p:nvPr>
+        </p:nvPicPr>
+        <p:blipFill>
+          <a:blip r:embed="rId2"/>
+          <a:stretch>
+            <a:fillRect/>
+          </a:stretch>
+        </p:blipFill>
+        <p:spPr>
+          <a:xfrm>
+            <a:off x="3464142" y="1825625"/>
+            <a:ext cx="5263715" cy="4351338"/>
+          </a:xfrm>
+          <a:prstGeom prst="rect">
+            <a:avLst/>
+          </a:prstGeom>
+        </p:spPr>
+      </p:pic>
+      <p:sp>
+        <p:nvSpPr>
+          <p:cNvPr id="4" name="Date Placeholder 3">
+            <a:extLst>
+              <a:ext uri="{FF2B5EF4-FFF2-40B4-BE49-F238E27FC236}">
+                <a16:creationId xmlns:a16="http://schemas.microsoft.com/office/drawing/2014/main" id="{5A8646EF-F18E-13FD-F78D-4D5E40CBB006}"/>
+              </a:ext>
+            </a:extLst>
+          </p:cNvPr>
+          <p:cNvSpPr>
+            <a:spLocks noGrp="1"/>
+          </p:cNvSpPr>
+          <p:nvPr>
+            <p:ph type="dt" sz="half" idx="10"/>
+          </p:nvPr>
+        </p:nvSpPr>
+        <p:spPr/>
+        <p:txBody>
+          <a:bodyPr/>
+          <a:lstStyle/>
+          <a:p>
+            <a:fld id="{CDC1A3F7-612D-48D0-A380-86227BC8600F}" type="datetime1">
+              <a:rPr lang="en-CA" smtClean="0"/>
+              <a:t>2026-03-02</a:t>
+            </a:fld>
+            <a:endParaRPr lang="en-CA"/>
+          </a:p>
+        </p:txBody>
+      </p:sp>
+      <p:sp>
+        <p:nvSpPr>
+          <p:cNvPr id="5" name="Footer Placeholder 4">
+            <a:extLst>
+              <a:ext uri="{FF2B5EF4-FFF2-40B4-BE49-F238E27FC236}">
+                <a16:creationId xmlns:a16="http://schemas.microsoft.com/office/drawing/2014/main" id="{C9BDB417-1B9D-51D8-AB3B-D8B077005951}"/>
+              </a:ext>
+            </a:extLst>
+          </p:cNvPr>
+          <p:cNvSpPr>
+            <a:spLocks noGrp="1"/>
+          </p:cNvSpPr>
+          <p:nvPr>
+            <p:ph type="ftr" sz="quarter" idx="11"/>
+          </p:nvPr>
+        </p:nvSpPr>
+        <p:spPr/>
+        <p:txBody>
+          <a:bodyPr/>
+          <a:lstStyle/>
+          <a:p>
+            <a:r>
+              <a:rPr lang="en-US"/>
+              <a:t>ECED3403 Computer Architecture. Colin O'Flynn.</a:t>
+            </a:r>
+            <a:endParaRPr lang="en-CA"/>
+          </a:p>
+        </p:txBody>
+      </p:sp>
+      <p:sp>
+        <p:nvSpPr>
+          <p:cNvPr id="6" name="Slide Number Placeholder 5">
+            <a:extLst>
+              <a:ext uri="{FF2B5EF4-FFF2-40B4-BE49-F238E27FC236}">
+                <a16:creationId xmlns:a16="http://schemas.microsoft.com/office/drawing/2014/main" id="{4F736CC5-8038-101E-A5FA-C2EBB8AD8865}"/>
+              </a:ext>
+            </a:extLst>
+          </p:cNvPr>
+          <p:cNvSpPr>
+            <a:spLocks noGrp="1"/>
+          </p:cNvSpPr>
+          <p:nvPr>
+            <p:ph type="sldNum" sz="quarter" idx="12"/>
+          </p:nvPr>
+        </p:nvSpPr>
+        <p:spPr/>
+        <p:txBody>
+          <a:bodyPr/>
+          <a:lstStyle/>
+          <a:p>
+            <a:fld id="{CF25CC40-D0F6-4666-ABAA-DE78F621EF61}" type="slidenum">
+              <a:rPr lang="en-CA" smtClean="0"/>
+              <a:t>45</a:t>
+            </a:fld>
+            <a:endParaRPr lang="en-CA"/>
+          </a:p>
+        </p:txBody>
+      </p:sp>
+    </p:spTree>
+    <p:extLst>
+      <p:ext uri="{BB962C8B-B14F-4D97-AF65-F5344CB8AC3E}">
+        <p14:creationId xmlns:p14="http://schemas.microsoft.com/office/powerpoint/2010/main" val="1610559298"/>
+      </p:ext>
+    </p:extLst>
+  </p:cSld>
+  <p:clrMapOvr>
+    <a:masterClrMapping/>
+  </p:clrMapOvr>
+</p:sld>
+</file>
+
+<file path=ppt/slides/slide46.xml><?xml version="1.0" encoding="utf-8"?>
 <p:sld xmlns:a="http://schemas.openxmlformats.org/drawingml/2006/main" xmlns:r="http://schemas.openxmlformats.org/officeDocument/2006/relationships" xmlns:p="http://schemas.openxmlformats.org/presentationml/2006/main">
   <p:cSld>
     <p:spTree>
@@ -44140,7 +45170,7 @@
           <a:p>
             <a:fld id="{CF25CC40-D0F6-4666-ABAA-DE78F621EF61}" type="slidenum">
               <a:rPr lang="en-CA" smtClean="0"/>
-              <a:t>42</a:t>
+              <a:t>46</a:t>
             </a:fld>
             <a:endParaRPr lang="en-CA"/>
           </a:p>
@@ -44159,7 +45189,7 @@
 </p:sld>
 </file>
 
-<file path=ppt/slides/slide43.xml><?xml version="1.0" encoding="utf-8"?>
+<file path=ppt/slides/slide47.xml><?xml version="1.0" encoding="utf-8"?>
 <p:sld xmlns:a="http://schemas.openxmlformats.org/drawingml/2006/main" xmlns:r="http://schemas.openxmlformats.org/officeDocument/2006/relationships" xmlns:p="http://schemas.openxmlformats.org/presentationml/2006/main">
   <p:cSld>
     <p:spTree>
@@ -44317,7 +45347,7 @@
           <a:p>
             <a:fld id="{CF25CC40-D0F6-4666-ABAA-DE78F621EF61}" type="slidenum">
               <a:rPr lang="en-CA" smtClean="0"/>
-              <a:t>43</a:t>
+              <a:t>47</a:t>
             </a:fld>
             <a:endParaRPr lang="en-CA"/>
           </a:p>
@@ -44380,7 +45410,7 @@
 </p:sld>
 </file>
 
-<file path=ppt/slides/slide44.xml><?xml version="1.0" encoding="utf-8"?>
+<file path=ppt/slides/slide48.xml><?xml version="1.0" encoding="utf-8"?>
 <p:sld xmlns:a="http://schemas.openxmlformats.org/drawingml/2006/main" xmlns:r="http://schemas.openxmlformats.org/officeDocument/2006/relationships" xmlns:p="http://schemas.openxmlformats.org/presentationml/2006/main">
   <p:cSld>
     <p:spTree>
@@ -44565,7 +45595,7 @@
           <a:p>
             <a:fld id="{CF25CC40-D0F6-4666-ABAA-DE78F621EF61}" type="slidenum">
               <a:rPr lang="en-CA" smtClean="0"/>
-              <a:t>44</a:t>
+              <a:t>48</a:t>
             </a:fld>
             <a:endParaRPr lang="en-CA"/>
           </a:p>
@@ -44584,7 +45614,510 @@
 </p:sld>
 </file>
 
-<file path=ppt/slides/slide45.xml><?xml version="1.0" encoding="utf-8"?>
+<file path=ppt/slides/slide49.xml><?xml version="1.0" encoding="utf-8"?>
+<p:sld xmlns:a="http://schemas.openxmlformats.org/drawingml/2006/main" xmlns:r="http://schemas.openxmlformats.org/officeDocument/2006/relationships" xmlns:p="http://schemas.openxmlformats.org/presentationml/2006/main">
+  <p:cSld>
+    <p:spTree>
+      <p:nvGrpSpPr>
+        <p:cNvPr id="1" name=""/>
+        <p:cNvGrpSpPr/>
+        <p:nvPr/>
+      </p:nvGrpSpPr>
+      <p:grpSpPr>
+        <a:xfrm>
+          <a:off x="0" y="0"/>
+          <a:ext cx="0" cy="0"/>
+          <a:chOff x="0" y="0"/>
+          <a:chExt cx="0" cy="0"/>
+        </a:xfrm>
+      </p:grpSpPr>
+      <p:pic>
+        <p:nvPicPr>
+          <p:cNvPr id="10" name="Picture 9">
+            <a:extLst>
+              <a:ext uri="{FF2B5EF4-FFF2-40B4-BE49-F238E27FC236}">
+                <a16:creationId xmlns:a16="http://schemas.microsoft.com/office/drawing/2014/main" id="{27248482-288C-EC6F-9244-64B4AAD72E3A}"/>
+              </a:ext>
+            </a:extLst>
+          </p:cNvPr>
+          <p:cNvPicPr>
+            <a:picLocks noChangeAspect="1"/>
+          </p:cNvPicPr>
+          <p:nvPr/>
+        </p:nvPicPr>
+        <p:blipFill>
+          <a:blip r:embed="rId2"/>
+          <a:stretch>
+            <a:fillRect/>
+          </a:stretch>
+        </p:blipFill>
+        <p:spPr>
+          <a:xfrm>
+            <a:off x="579131" y="1164097"/>
+            <a:ext cx="5569799" cy="4800794"/>
+          </a:xfrm>
+          <a:prstGeom prst="rect">
+            <a:avLst/>
+          </a:prstGeom>
+        </p:spPr>
+      </p:pic>
+      <p:sp>
+        <p:nvSpPr>
+          <p:cNvPr id="2" name="Title 1">
+            <a:extLst>
+              <a:ext uri="{FF2B5EF4-FFF2-40B4-BE49-F238E27FC236}">
+                <a16:creationId xmlns:a16="http://schemas.microsoft.com/office/drawing/2014/main" id="{9F27F183-9F92-AC12-E6E7-8A0D7C1B8458}"/>
+              </a:ext>
+            </a:extLst>
+          </p:cNvPr>
+          <p:cNvSpPr>
+            <a:spLocks noGrp="1"/>
+          </p:cNvSpPr>
+          <p:nvPr>
+            <p:ph type="title"/>
+          </p:nvPr>
+        </p:nvSpPr>
+        <p:spPr/>
+        <p:txBody>
+          <a:bodyPr/>
+          <a:lstStyle/>
+          <a:p>
+            <a:r>
+              <a:rPr lang="en-CA" dirty="0"/>
+              <a:t>Example of SRAM (Bus) Timing Settings</a:t>
+            </a:r>
+          </a:p>
+        </p:txBody>
+      </p:sp>
+      <p:sp>
+        <p:nvSpPr>
+          <p:cNvPr id="4" name="Date Placeholder 3">
+            <a:extLst>
+              <a:ext uri="{FF2B5EF4-FFF2-40B4-BE49-F238E27FC236}">
+                <a16:creationId xmlns:a16="http://schemas.microsoft.com/office/drawing/2014/main" id="{5C8B5E62-315D-6421-81A2-E0359B40A694}"/>
+              </a:ext>
+            </a:extLst>
+          </p:cNvPr>
+          <p:cNvSpPr>
+            <a:spLocks noGrp="1"/>
+          </p:cNvSpPr>
+          <p:nvPr>
+            <p:ph type="dt" sz="half" idx="10"/>
+          </p:nvPr>
+        </p:nvSpPr>
+        <p:spPr/>
+        <p:txBody>
+          <a:bodyPr/>
+          <a:lstStyle/>
+          <a:p>
+            <a:fld id="{CDC1A3F7-612D-48D0-A380-86227BC8600F}" type="datetime1">
+              <a:rPr lang="en-CA" smtClean="0"/>
+              <a:t>2026-03-02</a:t>
+            </a:fld>
+            <a:endParaRPr lang="en-CA"/>
+          </a:p>
+        </p:txBody>
+      </p:sp>
+      <p:sp>
+        <p:nvSpPr>
+          <p:cNvPr id="5" name="Footer Placeholder 4">
+            <a:extLst>
+              <a:ext uri="{FF2B5EF4-FFF2-40B4-BE49-F238E27FC236}">
+                <a16:creationId xmlns:a16="http://schemas.microsoft.com/office/drawing/2014/main" id="{33DD0819-E097-D6F7-7FCF-DBCA5D14C962}"/>
+              </a:ext>
+            </a:extLst>
+          </p:cNvPr>
+          <p:cNvSpPr>
+            <a:spLocks noGrp="1"/>
+          </p:cNvSpPr>
+          <p:nvPr>
+            <p:ph type="ftr" sz="quarter" idx="11"/>
+          </p:nvPr>
+        </p:nvSpPr>
+        <p:spPr/>
+        <p:txBody>
+          <a:bodyPr/>
+          <a:lstStyle/>
+          <a:p>
+            <a:r>
+              <a:rPr lang="en-US"/>
+              <a:t>ECED3403 Computer Architecture. Colin O'Flynn.</a:t>
+            </a:r>
+            <a:endParaRPr lang="en-CA"/>
+          </a:p>
+        </p:txBody>
+      </p:sp>
+      <p:sp>
+        <p:nvSpPr>
+          <p:cNvPr id="6" name="Slide Number Placeholder 5">
+            <a:extLst>
+              <a:ext uri="{FF2B5EF4-FFF2-40B4-BE49-F238E27FC236}">
+                <a16:creationId xmlns:a16="http://schemas.microsoft.com/office/drawing/2014/main" id="{BEE8ECB3-85D4-3594-5AD7-5998CF9733FE}"/>
+              </a:ext>
+            </a:extLst>
+          </p:cNvPr>
+          <p:cNvSpPr>
+            <a:spLocks noGrp="1"/>
+          </p:cNvSpPr>
+          <p:nvPr>
+            <p:ph type="sldNum" sz="quarter" idx="12"/>
+          </p:nvPr>
+        </p:nvSpPr>
+        <p:spPr/>
+        <p:txBody>
+          <a:bodyPr/>
+          <a:lstStyle/>
+          <a:p>
+            <a:fld id="{CF25CC40-D0F6-4666-ABAA-DE78F621EF61}" type="slidenum">
+              <a:rPr lang="en-CA" smtClean="0"/>
+              <a:t>49</a:t>
+            </a:fld>
+            <a:endParaRPr lang="en-CA" dirty="0"/>
+          </a:p>
+        </p:txBody>
+      </p:sp>
+      <p:sp>
+        <p:nvSpPr>
+          <p:cNvPr id="8" name="TextBox 7">
+            <a:extLst>
+              <a:ext uri="{FF2B5EF4-FFF2-40B4-BE49-F238E27FC236}">
+                <a16:creationId xmlns:a16="http://schemas.microsoft.com/office/drawing/2014/main" id="{12C022CA-E58A-4F2E-4EFD-93779196058A}"/>
+              </a:ext>
+            </a:extLst>
+          </p:cNvPr>
+          <p:cNvSpPr txBox="1"/>
+          <p:nvPr/>
+        </p:nvSpPr>
+        <p:spPr>
+          <a:xfrm>
+            <a:off x="2621370" y="5897325"/>
+            <a:ext cx="6096912" cy="369332"/>
+          </a:xfrm>
+          <a:prstGeom prst="rect">
+            <a:avLst/>
+          </a:prstGeom>
+          <a:noFill/>
+        </p:spPr>
+        <p:txBody>
+          <a:bodyPr wrap="square">
+            <a:spAutoFit/>
+          </a:bodyPr>
+          <a:lstStyle/>
+          <a:p>
+            <a:r>
+              <a:rPr lang="en-CA" dirty="0">
+                <a:hlinkClick r:id="rId3"/>
+              </a:rPr>
+              <a:t>https://www.issi.com/WW/pdf/62-65C256AL.pdf</a:t>
+            </a:r>
+            <a:r>
+              <a:rPr lang="en-CA" dirty="0"/>
+              <a:t> </a:t>
+            </a:r>
+          </a:p>
+        </p:txBody>
+      </p:sp>
+      <p:pic>
+        <p:nvPicPr>
+          <p:cNvPr id="12" name="Picture 11">
+            <a:extLst>
+              <a:ext uri="{FF2B5EF4-FFF2-40B4-BE49-F238E27FC236}">
+                <a16:creationId xmlns:a16="http://schemas.microsoft.com/office/drawing/2014/main" id="{4249664F-4FFA-A27F-0125-1BEE5CF493EA}"/>
+              </a:ext>
+            </a:extLst>
+          </p:cNvPr>
+          <p:cNvPicPr>
+            <a:picLocks noChangeAspect="1"/>
+          </p:cNvPicPr>
+          <p:nvPr/>
+        </p:nvPicPr>
+        <p:blipFill>
+          <a:blip r:embed="rId4"/>
+          <a:srcRect r="36965"/>
+          <a:stretch>
+            <a:fillRect/>
+          </a:stretch>
+        </p:blipFill>
+        <p:spPr>
+          <a:xfrm>
+            <a:off x="6208718" y="1514531"/>
+            <a:ext cx="5221821" cy="4099926"/>
+          </a:xfrm>
+          <a:prstGeom prst="rect">
+            <a:avLst/>
+          </a:prstGeom>
+        </p:spPr>
+      </p:pic>
+    </p:spTree>
+    <p:extLst>
+      <p:ext uri="{BB962C8B-B14F-4D97-AF65-F5344CB8AC3E}">
+        <p14:creationId xmlns:p14="http://schemas.microsoft.com/office/powerpoint/2010/main" val="1791151074"/>
+      </p:ext>
+    </p:extLst>
+  </p:cSld>
+  <p:clrMapOvr>
+    <a:masterClrMapping/>
+  </p:clrMapOvr>
+</p:sld>
+</file>
+
+<file path=ppt/slides/slide5.xml><?xml version="1.0" encoding="utf-8"?>
+<p:sld xmlns:a="http://schemas.openxmlformats.org/drawingml/2006/main" xmlns:r="http://schemas.openxmlformats.org/officeDocument/2006/relationships" xmlns:p="http://schemas.openxmlformats.org/presentationml/2006/main">
+  <p:cSld>
+    <p:spTree>
+      <p:nvGrpSpPr>
+        <p:cNvPr id="1" name=""/>
+        <p:cNvGrpSpPr/>
+        <p:nvPr/>
+      </p:nvGrpSpPr>
+      <p:grpSpPr>
+        <a:xfrm>
+          <a:off x="0" y="0"/>
+          <a:ext cx="0" cy="0"/>
+          <a:chOff x="0" y="0"/>
+          <a:chExt cx="0" cy="0"/>
+        </a:xfrm>
+      </p:grpSpPr>
+      <p:sp>
+        <p:nvSpPr>
+          <p:cNvPr id="2" name="Title 1">
+            <a:extLst>
+              <a:ext uri="{FF2B5EF4-FFF2-40B4-BE49-F238E27FC236}">
+                <a16:creationId xmlns:a16="http://schemas.microsoft.com/office/drawing/2014/main" id="{451C1A49-B4C0-A8AE-5E1A-5E72F184C320}"/>
+              </a:ext>
+            </a:extLst>
+          </p:cNvPr>
+          <p:cNvSpPr>
+            <a:spLocks noGrp="1"/>
+          </p:cNvSpPr>
+          <p:nvPr>
+            <p:ph type="title"/>
+          </p:nvPr>
+        </p:nvSpPr>
+        <p:spPr/>
+        <p:txBody>
+          <a:bodyPr/>
+          <a:lstStyle/>
+          <a:p>
+            <a:r>
+              <a:rPr lang="en-CA" i="1" dirty="0"/>
+              <a:t>What</a:t>
+            </a:r>
+            <a:r>
+              <a:rPr lang="en-CA" dirty="0"/>
+              <a:t> is a bus actually?</a:t>
+            </a:r>
+            <a:endParaRPr lang="en-CA" i="1" dirty="0"/>
+          </a:p>
+        </p:txBody>
+      </p:sp>
+      <p:sp>
+        <p:nvSpPr>
+          <p:cNvPr id="4" name="Date Placeholder 3">
+            <a:extLst>
+              <a:ext uri="{FF2B5EF4-FFF2-40B4-BE49-F238E27FC236}">
+                <a16:creationId xmlns:a16="http://schemas.microsoft.com/office/drawing/2014/main" id="{4D717A53-B5C5-C5E7-3D09-E0F344673396}"/>
+              </a:ext>
+            </a:extLst>
+          </p:cNvPr>
+          <p:cNvSpPr>
+            <a:spLocks noGrp="1"/>
+          </p:cNvSpPr>
+          <p:nvPr>
+            <p:ph type="dt" sz="half" idx="10"/>
+          </p:nvPr>
+        </p:nvSpPr>
+        <p:spPr/>
+        <p:txBody>
+          <a:bodyPr/>
+          <a:lstStyle/>
+          <a:p>
+            <a:fld id="{CDC1A3F7-612D-48D0-A380-86227BC8600F}" type="datetime1">
+              <a:rPr lang="en-CA" smtClean="0"/>
+              <a:t>2026-03-02</a:t>
+            </a:fld>
+            <a:endParaRPr lang="en-CA"/>
+          </a:p>
+        </p:txBody>
+      </p:sp>
+      <p:sp>
+        <p:nvSpPr>
+          <p:cNvPr id="5" name="Footer Placeholder 4">
+            <a:extLst>
+              <a:ext uri="{FF2B5EF4-FFF2-40B4-BE49-F238E27FC236}">
+                <a16:creationId xmlns:a16="http://schemas.microsoft.com/office/drawing/2014/main" id="{DB7650BD-3396-E28C-7B2E-310C1BBC97AC}"/>
+              </a:ext>
+            </a:extLst>
+          </p:cNvPr>
+          <p:cNvSpPr>
+            <a:spLocks noGrp="1"/>
+          </p:cNvSpPr>
+          <p:nvPr>
+            <p:ph type="ftr" sz="quarter" idx="11"/>
+          </p:nvPr>
+        </p:nvSpPr>
+        <p:spPr/>
+        <p:txBody>
+          <a:bodyPr/>
+          <a:lstStyle/>
+          <a:p>
+            <a:r>
+              <a:rPr lang="en-US"/>
+              <a:t>ECED3403 Computer Architecture. Colin O'Flynn.</a:t>
+            </a:r>
+            <a:endParaRPr lang="en-CA"/>
+          </a:p>
+        </p:txBody>
+      </p:sp>
+      <p:sp>
+        <p:nvSpPr>
+          <p:cNvPr id="6" name="Slide Number Placeholder 5">
+            <a:extLst>
+              <a:ext uri="{FF2B5EF4-FFF2-40B4-BE49-F238E27FC236}">
+                <a16:creationId xmlns:a16="http://schemas.microsoft.com/office/drawing/2014/main" id="{0256BAAE-FF4E-934A-1532-FE982B8C00CA}"/>
+              </a:ext>
+            </a:extLst>
+          </p:cNvPr>
+          <p:cNvSpPr>
+            <a:spLocks noGrp="1"/>
+          </p:cNvSpPr>
+          <p:nvPr>
+            <p:ph type="sldNum" sz="quarter" idx="12"/>
+          </p:nvPr>
+        </p:nvSpPr>
+        <p:spPr/>
+        <p:txBody>
+          <a:bodyPr/>
+          <a:lstStyle/>
+          <a:p>
+            <a:fld id="{CF25CC40-D0F6-4666-ABAA-DE78F621EF61}" type="slidenum">
+              <a:rPr lang="en-CA" smtClean="0"/>
+              <a:t>5</a:t>
+            </a:fld>
+            <a:endParaRPr lang="en-CA"/>
+          </a:p>
+        </p:txBody>
+      </p:sp>
+      <p:sp>
+        <p:nvSpPr>
+          <p:cNvPr id="8" name="TextBox 7">
+            <a:extLst>
+              <a:ext uri="{FF2B5EF4-FFF2-40B4-BE49-F238E27FC236}">
+                <a16:creationId xmlns:a16="http://schemas.microsoft.com/office/drawing/2014/main" id="{60CBDC3B-C21F-2632-EE05-52814745E2CC}"/>
+              </a:ext>
+            </a:extLst>
+          </p:cNvPr>
+          <p:cNvSpPr txBox="1"/>
+          <p:nvPr/>
+        </p:nvSpPr>
+        <p:spPr>
+          <a:xfrm>
+            <a:off x="1393064" y="5710019"/>
+            <a:ext cx="9013065" cy="369332"/>
+          </a:xfrm>
+          <a:prstGeom prst="rect">
+            <a:avLst/>
+          </a:prstGeom>
+          <a:noFill/>
+        </p:spPr>
+        <p:txBody>
+          <a:bodyPr wrap="square">
+            <a:spAutoFit/>
+          </a:bodyPr>
+          <a:lstStyle/>
+          <a:p>
+            <a:r>
+              <a:rPr lang="en-CA" dirty="0">
+                <a:hlinkClick r:id="rId2"/>
+              </a:rPr>
+              <a:t>https://www.madexp.it/2018/02/26/z80-single-board-computer/</a:t>
+            </a:r>
+            <a:r>
+              <a:rPr lang="en-CA" dirty="0"/>
+              <a:t> </a:t>
+            </a:r>
+          </a:p>
+        </p:txBody>
+      </p:sp>
+      <p:pic>
+        <p:nvPicPr>
+          <p:cNvPr id="10" name="Picture 9" descr="A diagram of a chip&#10;&#10;AI-generated content may be incorrect.">
+            <a:extLst>
+              <a:ext uri="{FF2B5EF4-FFF2-40B4-BE49-F238E27FC236}">
+                <a16:creationId xmlns:a16="http://schemas.microsoft.com/office/drawing/2014/main" id="{E3DF3695-5B85-160A-FEAA-7F2D42D5B8F9}"/>
+              </a:ext>
+            </a:extLst>
+          </p:cNvPr>
+          <p:cNvPicPr>
+            <a:picLocks noChangeAspect="1"/>
+          </p:cNvPicPr>
+          <p:nvPr/>
+        </p:nvPicPr>
+        <p:blipFill>
+          <a:blip r:embed="rId3"/>
+          <a:stretch>
+            <a:fillRect/>
+          </a:stretch>
+        </p:blipFill>
+        <p:spPr>
+          <a:xfrm>
+            <a:off x="2278184" y="1283086"/>
+            <a:ext cx="6413920" cy="4426933"/>
+          </a:xfrm>
+          <a:prstGeom prst="rect">
+            <a:avLst/>
+          </a:prstGeom>
+        </p:spPr>
+      </p:pic>
+      <p:sp>
+        <p:nvSpPr>
+          <p:cNvPr id="3" name="TextBox 2">
+            <a:extLst>
+              <a:ext uri="{FF2B5EF4-FFF2-40B4-BE49-F238E27FC236}">
+                <a16:creationId xmlns:a16="http://schemas.microsoft.com/office/drawing/2014/main" id="{FE3960DF-4F34-F601-53E2-65BA5F614943}"/>
+              </a:ext>
+            </a:extLst>
+          </p:cNvPr>
+          <p:cNvSpPr txBox="1"/>
+          <p:nvPr/>
+        </p:nvSpPr>
+        <p:spPr>
+          <a:xfrm>
+            <a:off x="9234152" y="3232597"/>
+            <a:ext cx="2427668" cy="646331"/>
+          </a:xfrm>
+          <a:prstGeom prst="rect">
+            <a:avLst/>
+          </a:prstGeom>
+          <a:noFill/>
+        </p:spPr>
+        <p:txBody>
+          <a:bodyPr wrap="square" rtlCol="0">
+            <a:spAutoFit/>
+          </a:bodyPr>
+          <a:lstStyle/>
+          <a:p>
+            <a:r>
+              <a:rPr lang="en-CA" b="1" dirty="0"/>
+              <a:t>(Go to next slide for bigger version)</a:t>
+            </a:r>
+          </a:p>
+        </p:txBody>
+      </p:sp>
+    </p:spTree>
+    <p:extLst>
+      <p:ext uri="{BB962C8B-B14F-4D97-AF65-F5344CB8AC3E}">
+        <p14:creationId xmlns:p14="http://schemas.microsoft.com/office/powerpoint/2010/main" val="1497373760"/>
+      </p:ext>
+    </p:extLst>
+  </p:cSld>
+  <p:clrMapOvr>
+    <a:masterClrMapping/>
+  </p:clrMapOvr>
+</p:sld>
+</file>
+
+<file path=ppt/slides/slide50.xml><?xml version="1.0" encoding="utf-8"?>
 <p:sld xmlns:a="http://schemas.openxmlformats.org/drawingml/2006/main" xmlns:r="http://schemas.openxmlformats.org/officeDocument/2006/relationships" xmlns:p="http://schemas.openxmlformats.org/presentationml/2006/main">
   <p:cSld>
     <p:spTree>
@@ -44754,7 +46287,7 @@
           <a:p>
             <a:fld id="{CF25CC40-D0F6-4666-ABAA-DE78F621EF61}" type="slidenum">
               <a:rPr lang="en-CA" smtClean="0"/>
-              <a:t>45</a:t>
+              <a:t>50</a:t>
             </a:fld>
             <a:endParaRPr lang="en-CA"/>
           </a:p>
@@ -44833,7 +46366,7 @@
 </p:sld>
 </file>
 
-<file path=ppt/slides/slide46.xml><?xml version="1.0" encoding="utf-8"?>
+<file path=ppt/slides/slide51.xml><?xml version="1.0" encoding="utf-8"?>
 <p:sld xmlns:a="http://schemas.openxmlformats.org/drawingml/2006/main" xmlns:r="http://schemas.openxmlformats.org/officeDocument/2006/relationships" xmlns:p="http://schemas.openxmlformats.org/presentationml/2006/main">
   <p:cSld>
     <p:spTree>
@@ -44984,7 +46517,7 @@
           <a:p>
             <a:fld id="{CDC1A3F7-612D-48D0-A380-86227BC8600F}" type="datetime1">
               <a:rPr lang="en-CA" smtClean="0"/>
-              <a:t>2026-03-01</a:t>
+              <a:t>2026-03-02</a:t>
             </a:fld>
             <a:endParaRPr lang="en-CA"/>
           </a:p>
@@ -45042,7 +46575,7 @@
           <a:p>
             <a:fld id="{CF25CC40-D0F6-4666-ABAA-DE78F621EF61}" type="slidenum">
               <a:rPr lang="en-CA" smtClean="0"/>
-              <a:t>46</a:t>
+              <a:t>51</a:t>
             </a:fld>
             <a:endParaRPr lang="en-CA"/>
           </a:p>
@@ -45061,7 +46594,7 @@
 </p:sld>
 </file>
 
-<file path=ppt/slides/slide47.xml><?xml version="1.0" encoding="utf-8"?>
+<file path=ppt/slides/slide52.xml><?xml version="1.0" encoding="utf-8"?>
 <p:sld xmlns:a="http://schemas.openxmlformats.org/drawingml/2006/main" xmlns:r="http://schemas.openxmlformats.org/officeDocument/2006/relationships" xmlns:p="http://schemas.openxmlformats.org/presentationml/2006/main">
   <p:cSld>
     <p:spTree>
@@ -45187,7 +46720,7 @@
           <a:p>
             <a:fld id="{CF25CC40-D0F6-4666-ABAA-DE78F621EF61}" type="slidenum">
               <a:rPr lang="en-CA" smtClean="0"/>
-              <a:t>47</a:t>
+              <a:t>52</a:t>
             </a:fld>
             <a:endParaRPr lang="en-CA"/>
           </a:p>
@@ -45282,7 +46815,7 @@
 </p:sld>
 </file>
 
-<file path=ppt/slides/slide48.xml><?xml version="1.0" encoding="utf-8"?>
+<file path=ppt/slides/slide53.xml><?xml version="1.0" encoding="utf-8"?>
 <p:sld xmlns:a="http://schemas.openxmlformats.org/drawingml/2006/main" xmlns:r="http://schemas.openxmlformats.org/officeDocument/2006/relationships" xmlns:p="http://schemas.openxmlformats.org/presentationml/2006/main">
   <p:cSld>
     <p:spTree>
@@ -45482,7 +47015,7 @@
           <a:p>
             <a:fld id="{CF25CC40-D0F6-4666-ABAA-DE78F621EF61}" type="slidenum">
               <a:rPr lang="en-CA" smtClean="0"/>
-              <a:t>48</a:t>
+              <a:t>53</a:t>
             </a:fld>
             <a:endParaRPr lang="en-CA"/>
           </a:p>
@@ -45492,227 +47025,6 @@
     <p:extLst>
       <p:ext uri="{BB962C8B-B14F-4D97-AF65-F5344CB8AC3E}">
         <p14:creationId xmlns:p14="http://schemas.microsoft.com/office/powerpoint/2010/main" val="54154921"/>
-      </p:ext>
-    </p:extLst>
-  </p:cSld>
-  <p:clrMapOvr>
-    <a:masterClrMapping/>
-  </p:clrMapOvr>
-</p:sld>
-</file>
-
-<file path=ppt/slides/slide5.xml><?xml version="1.0" encoding="utf-8"?>
-<p:sld xmlns:a="http://schemas.openxmlformats.org/drawingml/2006/main" xmlns:r="http://schemas.openxmlformats.org/officeDocument/2006/relationships" xmlns:p="http://schemas.openxmlformats.org/presentationml/2006/main">
-  <p:cSld>
-    <p:spTree>
-      <p:nvGrpSpPr>
-        <p:cNvPr id="1" name=""/>
-        <p:cNvGrpSpPr/>
-        <p:nvPr/>
-      </p:nvGrpSpPr>
-      <p:grpSpPr>
-        <a:xfrm>
-          <a:off x="0" y="0"/>
-          <a:ext cx="0" cy="0"/>
-          <a:chOff x="0" y="0"/>
-          <a:chExt cx="0" cy="0"/>
-        </a:xfrm>
-      </p:grpSpPr>
-      <p:sp>
-        <p:nvSpPr>
-          <p:cNvPr id="2" name="Title 1">
-            <a:extLst>
-              <a:ext uri="{FF2B5EF4-FFF2-40B4-BE49-F238E27FC236}">
-                <a16:creationId xmlns:a16="http://schemas.microsoft.com/office/drawing/2014/main" id="{451C1A49-B4C0-A8AE-5E1A-5E72F184C320}"/>
-              </a:ext>
-            </a:extLst>
-          </p:cNvPr>
-          <p:cNvSpPr>
-            <a:spLocks noGrp="1"/>
-          </p:cNvSpPr>
-          <p:nvPr>
-            <p:ph type="title"/>
-          </p:nvPr>
-        </p:nvSpPr>
-        <p:spPr/>
-        <p:txBody>
-          <a:bodyPr/>
-          <a:lstStyle/>
-          <a:p>
-            <a:r>
-              <a:rPr lang="en-CA" i="1" dirty="0"/>
-              <a:t>What</a:t>
-            </a:r>
-            <a:r>
-              <a:rPr lang="en-CA" dirty="0"/>
-              <a:t> is a bus actually?</a:t>
-            </a:r>
-            <a:endParaRPr lang="en-CA" i="1" dirty="0"/>
-          </a:p>
-        </p:txBody>
-      </p:sp>
-      <p:sp>
-        <p:nvSpPr>
-          <p:cNvPr id="4" name="Date Placeholder 3">
-            <a:extLst>
-              <a:ext uri="{FF2B5EF4-FFF2-40B4-BE49-F238E27FC236}">
-                <a16:creationId xmlns:a16="http://schemas.microsoft.com/office/drawing/2014/main" id="{4D717A53-B5C5-C5E7-3D09-E0F344673396}"/>
-              </a:ext>
-            </a:extLst>
-          </p:cNvPr>
-          <p:cNvSpPr>
-            <a:spLocks noGrp="1"/>
-          </p:cNvSpPr>
-          <p:nvPr>
-            <p:ph type="dt" sz="half" idx="10"/>
-          </p:nvPr>
-        </p:nvSpPr>
-        <p:spPr/>
-        <p:txBody>
-          <a:bodyPr/>
-          <a:lstStyle/>
-          <a:p>
-            <a:fld id="{CDC1A3F7-612D-48D0-A380-86227BC8600F}" type="datetime1">
-              <a:rPr lang="en-CA" smtClean="0"/>
-              <a:t>2026-03-01</a:t>
-            </a:fld>
-            <a:endParaRPr lang="en-CA"/>
-          </a:p>
-        </p:txBody>
-      </p:sp>
-      <p:sp>
-        <p:nvSpPr>
-          <p:cNvPr id="5" name="Footer Placeholder 4">
-            <a:extLst>
-              <a:ext uri="{FF2B5EF4-FFF2-40B4-BE49-F238E27FC236}">
-                <a16:creationId xmlns:a16="http://schemas.microsoft.com/office/drawing/2014/main" id="{DB7650BD-3396-E28C-7B2E-310C1BBC97AC}"/>
-              </a:ext>
-            </a:extLst>
-          </p:cNvPr>
-          <p:cNvSpPr>
-            <a:spLocks noGrp="1"/>
-          </p:cNvSpPr>
-          <p:nvPr>
-            <p:ph type="ftr" sz="quarter" idx="11"/>
-          </p:nvPr>
-        </p:nvSpPr>
-        <p:spPr/>
-        <p:txBody>
-          <a:bodyPr/>
-          <a:lstStyle/>
-          <a:p>
-            <a:r>
-              <a:rPr lang="en-US"/>
-              <a:t>ECED3403 Computer Architecture. Colin O'Flynn.</a:t>
-            </a:r>
-            <a:endParaRPr lang="en-CA"/>
-          </a:p>
-        </p:txBody>
-      </p:sp>
-      <p:sp>
-        <p:nvSpPr>
-          <p:cNvPr id="6" name="Slide Number Placeholder 5">
-            <a:extLst>
-              <a:ext uri="{FF2B5EF4-FFF2-40B4-BE49-F238E27FC236}">
-                <a16:creationId xmlns:a16="http://schemas.microsoft.com/office/drawing/2014/main" id="{0256BAAE-FF4E-934A-1532-FE982B8C00CA}"/>
-              </a:ext>
-            </a:extLst>
-          </p:cNvPr>
-          <p:cNvSpPr>
-            <a:spLocks noGrp="1"/>
-          </p:cNvSpPr>
-          <p:nvPr>
-            <p:ph type="sldNum" sz="quarter" idx="12"/>
-          </p:nvPr>
-        </p:nvSpPr>
-        <p:spPr/>
-        <p:txBody>
-          <a:bodyPr/>
-          <a:lstStyle/>
-          <a:p>
-            <a:fld id="{CF25CC40-D0F6-4666-ABAA-DE78F621EF61}" type="slidenum">
-              <a:rPr lang="en-CA" smtClean="0"/>
-              <a:t>5</a:t>
-            </a:fld>
-            <a:endParaRPr lang="en-CA"/>
-          </a:p>
-        </p:txBody>
-      </p:sp>
-      <p:sp>
-        <p:nvSpPr>
-          <p:cNvPr id="8" name="TextBox 7">
-            <a:extLst>
-              <a:ext uri="{FF2B5EF4-FFF2-40B4-BE49-F238E27FC236}">
-                <a16:creationId xmlns:a16="http://schemas.microsoft.com/office/drawing/2014/main" id="{60CBDC3B-C21F-2632-EE05-52814745E2CC}"/>
-              </a:ext>
-            </a:extLst>
-          </p:cNvPr>
-          <p:cNvSpPr txBox="1"/>
-          <p:nvPr/>
-        </p:nvSpPr>
-        <p:spPr>
-          <a:xfrm>
-            <a:off x="1393064" y="5710019"/>
-            <a:ext cx="9013065" cy="369332"/>
-          </a:xfrm>
-          <a:prstGeom prst="rect">
-            <a:avLst/>
-          </a:prstGeom>
-          <a:noFill/>
-        </p:spPr>
-        <p:txBody>
-          <a:bodyPr wrap="square">
-            <a:spAutoFit/>
-          </a:bodyPr>
-          <a:lstStyle/>
-          <a:p>
-            <a:r>
-              <a:rPr lang="en-CA" dirty="0">
-                <a:hlinkClick r:id="rId2"/>
-              </a:rPr>
-              <a:t>https://www.madexp.it/2018/02/26/z80-single-board-computer/</a:t>
-            </a:r>
-            <a:r>
-              <a:rPr lang="en-CA" dirty="0"/>
-              <a:t> </a:t>
-            </a:r>
-          </a:p>
-        </p:txBody>
-      </p:sp>
-      <p:pic>
-        <p:nvPicPr>
-          <p:cNvPr id="10" name="Picture 9" descr="A diagram of a chip&#10;&#10;AI-generated content may be incorrect.">
-            <a:extLst>
-              <a:ext uri="{FF2B5EF4-FFF2-40B4-BE49-F238E27FC236}">
-                <a16:creationId xmlns:a16="http://schemas.microsoft.com/office/drawing/2014/main" id="{E3DF3695-5B85-160A-FEAA-7F2D42D5B8F9}"/>
-              </a:ext>
-            </a:extLst>
-          </p:cNvPr>
-          <p:cNvPicPr>
-            <a:picLocks noChangeAspect="1"/>
-          </p:cNvPicPr>
-          <p:nvPr/>
-        </p:nvPicPr>
-        <p:blipFill>
-          <a:blip r:embed="rId3"/>
-          <a:stretch>
-            <a:fillRect/>
-          </a:stretch>
-        </p:blipFill>
-        <p:spPr>
-          <a:xfrm>
-            <a:off x="2278184" y="1283086"/>
-            <a:ext cx="6413920" cy="4426933"/>
-          </a:xfrm>
-          <a:prstGeom prst="rect">
-            <a:avLst/>
-          </a:prstGeom>
-        </p:spPr>
-      </p:pic>
-    </p:spTree>
-    <p:extLst>
-      <p:ext uri="{BB962C8B-B14F-4D97-AF65-F5344CB8AC3E}">
-        <p14:creationId xmlns:p14="http://schemas.microsoft.com/office/powerpoint/2010/main" val="1497373760"/>
       </p:ext>
     </p:extLst>
   </p:cSld>
@@ -45762,7 +47074,7 @@
           <a:p>
             <a:fld id="{CDC1A3F7-612D-48D0-A380-86227BC8600F}" type="datetime1">
               <a:rPr lang="en-CA" smtClean="0"/>
-              <a:t>2026-03-01</a:t>
+              <a:t>2026-03-02</a:t>
             </a:fld>
             <a:endParaRPr lang="en-CA"/>
           </a:p>
@@ -45934,7 +47246,7 @@
         <p:spPr>
           <a:xfrm>
             <a:off x="838200" y="1825625"/>
-            <a:ext cx="4280877" cy="4351338"/>
+            <a:ext cx="7172459" cy="4351338"/>
           </a:xfrm>
         </p:spPr>
         <p:txBody>
@@ -45950,7 +47262,7 @@
             <a:pPr lvl="1"/>
             <a:r>
               <a:rPr lang="en-CA" dirty="0"/>
-              <a:t>Even this simple system has a “memory map”</a:t>
+              <a:t>Even this simple system has a “memory map” – note use of A15 to select </a:t>
             </a:r>
           </a:p>
           <a:p>
@@ -45996,7 +47308,7 @@
           <a:p>
             <a:fld id="{CDC1A3F7-612D-48D0-A380-86227BC8600F}" type="datetime1">
               <a:rPr lang="en-CA" smtClean="0"/>
-              <a:t>2026-03-01</a:t>
+              <a:t>2026-03-02</a:t>
             </a:fld>
             <a:endParaRPr lang="en-CA"/>
           </a:p>
@@ -46269,7 +47581,7 @@
           <a:p>
             <a:fld id="{CDC1A3F7-612D-48D0-A380-86227BC8600F}" type="datetime1">
               <a:rPr lang="en-CA" smtClean="0"/>
-              <a:t>2026-03-01</a:t>
+              <a:t>2026-03-02</a:t>
             </a:fld>
             <a:endParaRPr lang="en-CA"/>
           </a:p>
@@ -46506,7 +47818,7 @@
           <a:p>
             <a:fld id="{CDC1A3F7-612D-48D0-A380-86227BC8600F}" type="datetime1">
               <a:rPr lang="en-CA" smtClean="0"/>
-              <a:t>2026-03-01</a:t>
+              <a:t>2026-03-02</a:t>
             </a:fld>
             <a:endParaRPr lang="en-CA"/>
           </a:p>
